--- a/RAC/14장/14장_srvctl과crsctl명령체계.pptx
+++ b/RAC/14장/14장_srvctl과crsctl명령체계.pptx
@@ -4,52 +4,55 @@
   <p:sldMasterIdLst>
     <p:sldMasterId id="2147483648" r:id="rId1"/>
   </p:sldMasterIdLst>
+  <p:notesMasterIdLst>
+    <p:notesMasterId r:id="rId45"/>
+  </p:notesMasterIdLst>
   <p:sldIdLst>
-    <p:sldId id="256" r:id="rId7"/>
-    <p:sldId id="257" r:id="rId8"/>
-    <p:sldId id="258" r:id="rId9"/>
-    <p:sldId id="259" r:id="rId10"/>
-    <p:sldId id="260" r:id="rId12"/>
-    <p:sldId id="261" r:id="rId13"/>
-    <p:sldId id="262" r:id="rId14"/>
-    <p:sldId id="263" r:id="rId15"/>
-    <p:sldId id="264" r:id="rId16"/>
-    <p:sldId id="265" r:id="rId17"/>
-    <p:sldId id="266" r:id="rId18"/>
-    <p:sldId id="267" r:id="rId19"/>
-    <p:sldId id="268" r:id="rId20"/>
-    <p:sldId id="269" r:id="rId21"/>
-    <p:sldId id="270" r:id="rId22"/>
-    <p:sldId id="271" r:id="rId23"/>
-    <p:sldId id="272" r:id="rId24"/>
-    <p:sldId id="273" r:id="rId25"/>
-    <p:sldId id="274" r:id="rId26"/>
-    <p:sldId id="275" r:id="rId27"/>
-    <p:sldId id="276" r:id="rId28"/>
-    <p:sldId id="277" r:id="rId29"/>
-    <p:sldId id="278" r:id="rId30"/>
-    <p:sldId id="279" r:id="rId31"/>
-    <p:sldId id="280" r:id="rId32"/>
-    <p:sldId id="281" r:id="rId33"/>
-    <p:sldId id="282" r:id="rId34"/>
-    <p:sldId id="283" r:id="rId35"/>
-    <p:sldId id="284" r:id="rId36"/>
-    <p:sldId id="285" r:id="rId37"/>
-    <p:sldId id="286" r:id="rId38"/>
-    <p:sldId id="287" r:id="rId39"/>
-    <p:sldId id="288" r:id="rId40"/>
-    <p:sldId id="289" r:id="rId41"/>
-    <p:sldId id="290" r:id="rId42"/>
-    <p:sldId id="291" r:id="rId43"/>
-    <p:sldId id="292" r:id="rId44"/>
-    <p:sldId id="293" r:id="rId45"/>
-    <p:sldId id="294" r:id="rId46"/>
-    <p:sldId id="295" r:id="rId47"/>
-    <p:sldId id="296" r:id="rId48"/>
-    <p:sldId id="297" r:id="rId49"/>
-    <p:sldId id="298" r:id="rId50"/>
+    <p:sldId id="256" r:id="rId2"/>
+    <p:sldId id="257" r:id="rId3"/>
+    <p:sldId id="258" r:id="rId4"/>
+    <p:sldId id="259" r:id="rId5"/>
+    <p:sldId id="260" r:id="rId6"/>
+    <p:sldId id="261" r:id="rId7"/>
+    <p:sldId id="262" r:id="rId8"/>
+    <p:sldId id="263" r:id="rId9"/>
+    <p:sldId id="264" r:id="rId10"/>
+    <p:sldId id="265" r:id="rId11"/>
+    <p:sldId id="266" r:id="rId12"/>
+    <p:sldId id="267" r:id="rId13"/>
+    <p:sldId id="268" r:id="rId14"/>
+    <p:sldId id="269" r:id="rId15"/>
+    <p:sldId id="270" r:id="rId16"/>
+    <p:sldId id="271" r:id="rId17"/>
+    <p:sldId id="272" r:id="rId18"/>
+    <p:sldId id="273" r:id="rId19"/>
+    <p:sldId id="274" r:id="rId20"/>
+    <p:sldId id="275" r:id="rId21"/>
+    <p:sldId id="276" r:id="rId22"/>
+    <p:sldId id="277" r:id="rId23"/>
+    <p:sldId id="278" r:id="rId24"/>
+    <p:sldId id="279" r:id="rId25"/>
+    <p:sldId id="280" r:id="rId26"/>
+    <p:sldId id="281" r:id="rId27"/>
+    <p:sldId id="282" r:id="rId28"/>
+    <p:sldId id="283" r:id="rId29"/>
+    <p:sldId id="284" r:id="rId30"/>
+    <p:sldId id="285" r:id="rId31"/>
+    <p:sldId id="286" r:id="rId32"/>
+    <p:sldId id="287" r:id="rId33"/>
+    <p:sldId id="288" r:id="rId34"/>
+    <p:sldId id="289" r:id="rId35"/>
+    <p:sldId id="290" r:id="rId36"/>
+    <p:sldId id="291" r:id="rId37"/>
+    <p:sldId id="292" r:id="rId38"/>
+    <p:sldId id="293" r:id="rId39"/>
+    <p:sldId id="294" r:id="rId40"/>
+    <p:sldId id="295" r:id="rId41"/>
+    <p:sldId id="296" r:id="rId42"/>
+    <p:sldId id="297" r:id="rId43"/>
+    <p:sldId id="298" r:id="rId44"/>
   </p:sldIdLst>
-  <p:sldSz cx="12191695" cy="6858000" type="screen4x3"/>
+  <p:sldSz cx="12192000" cy="6858000"/>
   <p:notesSz cx="6858000" cy="9144000"/>
   <p:defaultTextStyle>
     <a:defPPr>
@@ -146,11 +149,27 @@
       </a:defRPr>
     </a:lvl9pPr>
   </p:defaultTextStyle>
+  <p:extLst>
+    <p:ext uri="{EFAFB233-063F-42B5-8137-9DF3F51BA10A}">
+      <p15:sldGuideLst xmlns:p15="http://schemas.microsoft.com/office/powerpoint/2012/main">
+        <p15:guide id="1" orient="horz" pos="2160">
+          <p15:clr>
+            <a:srgbClr val="A4A3A4"/>
+          </p15:clr>
+        </p15:guide>
+        <p15:guide id="2" pos="2880">
+          <p15:clr>
+            <a:srgbClr val="A4A3A4"/>
+          </p15:clr>
+        </p15:guide>
+      </p15:sldGuideLst>
+    </p:ext>
+  </p:extLst>
 </p:presentation>
 </file>
 
 <file path=ppt/notesMasters/notesMaster1.xml><?xml version="1.0" encoding="utf-8"?>
-<p:notesMaster xmlns:a="http://schemas.openxmlformats.org/drawingml/2006/main" xmlns:p="http://schemas.openxmlformats.org/presentationml/2006/main" xmlns:r="http://schemas.openxmlformats.org/officeDocument/2006/relationships">
+<p:notesMaster xmlns:a="http://schemas.openxmlformats.org/drawingml/2006/main" xmlns:r="http://schemas.openxmlformats.org/officeDocument/2006/relationships" xmlns:p="http://schemas.openxmlformats.org/presentationml/2006/main">
   <p:cSld>
     <p:bg>
       <p:bgRef idx="1001">
@@ -173,7 +192,7 @@
       </p:grpSpPr>
       <p:sp>
         <p:nvSpPr>
-          <p:cNvPr id="2" name="Header Placeholder 1"/>
+          <p:cNvPr id="2" name="머리글 개체 틀 1"/>
           <p:cNvSpPr>
             <a:spLocks noGrp="1"/>
           </p:cNvSpPr>
@@ -184,7 +203,7 @@
         <p:spPr>
           <a:xfrm>
             <a:off x="0" y="0"/>
-            <a:ext cx="2971800" cy="457200"/>
+            <a:ext cx="2971800" cy="458788"/>
           </a:xfrm>
           <a:prstGeom prst="rect">
             <a:avLst/>
@@ -198,13 +217,13 @@
             </a:lvl1pPr>
           </a:lstStyle>
           <a:p>
-            <a:endParaRPr lang="en-US"/>
-          </a:p>
-        </p:txBody>
-      </p:sp>
-      <p:sp>
-        <p:nvSpPr>
-          <p:cNvPr id="3" name="Date Placeholder 2"/>
+            <a:endParaRPr lang="ko-KR" altLang="en-US"/>
+          </a:p>
+        </p:txBody>
+      </p:sp>
+      <p:sp>
+        <p:nvSpPr>
+          <p:cNvPr id="3" name="날짜 개체 틀 2"/>
           <p:cNvSpPr>
             <a:spLocks noGrp="1"/>
           </p:cNvSpPr>
@@ -215,7 +234,7 @@
         <p:spPr>
           <a:xfrm>
             <a:off x="3884613" y="0"/>
-            <a:ext cx="2971800" cy="457200"/>
+            <a:ext cx="2971800" cy="458788"/>
           </a:xfrm>
           <a:prstGeom prst="rect">
             <a:avLst/>
@@ -229,17 +248,17 @@
             </a:lvl1pPr>
           </a:lstStyle>
           <a:p>
-            <a:fld id="{0F89C1C7-3DCD-1040-A9CF-14679D8B5DDD}" type="datetimeFigureOut">
-              <a:rPr lang="en-US" smtClean="0"/>
-              <a:t>10/17/16</a:t>
+            <a:fld id="{AB231364-2A1C-4124-A965-8EA896727A95}" type="datetimeFigureOut">
+              <a:rPr lang="ko-KR" altLang="en-US" smtClean="0"/>
+              <a:t>2026-10-29</a:t>
             </a:fld>
-            <a:endParaRPr lang="en-US"/>
-          </a:p>
-        </p:txBody>
-      </p:sp>
-      <p:sp>
-        <p:nvSpPr>
-          <p:cNvPr id="4" name="Slide Image Placeholder 3"/>
+            <a:endParaRPr lang="ko-KR" altLang="en-US"/>
+          </a:p>
+        </p:txBody>
+      </p:sp>
+      <p:sp>
+        <p:nvSpPr>
+          <p:cNvPr id="4" name="슬라이드 이미지 개체 틀 3"/>
           <p:cNvSpPr>
             <a:spLocks noGrp="1" noRot="1" noChangeAspect="1"/>
           </p:cNvSpPr>
@@ -249,8 +268,8 @@
         </p:nvSpPr>
         <p:spPr>
           <a:xfrm>
-            <a:off x="1143000" y="685800"/>
-            <a:ext cx="4572000" cy="3429000"/>
+            <a:off x="685800" y="1143000"/>
+            <a:ext cx="5486400" cy="3086100"/>
           </a:xfrm>
           <a:prstGeom prst="rect">
             <a:avLst/>
@@ -266,13 +285,13 @@
           <a:bodyPr vert="horz" lIns="91440" tIns="45720" rIns="91440" bIns="45720" rtlCol="0" anchor="ctr"/>
           <a:lstStyle/>
           <a:p>
-            <a:endParaRPr lang="en-US"/>
-          </a:p>
-        </p:txBody>
-      </p:sp>
-      <p:sp>
-        <p:nvSpPr>
-          <p:cNvPr id="5" name="Notes Placeholder 4"/>
+            <a:endParaRPr lang="ko-KR" altLang="en-US"/>
+          </a:p>
+        </p:txBody>
+      </p:sp>
+      <p:sp>
+        <p:nvSpPr>
+          <p:cNvPr id="5" name="슬라이드 노트 개체 틀 4"/>
           <p:cNvSpPr>
             <a:spLocks noGrp="1"/>
           </p:cNvSpPr>
@@ -282,8 +301,8 @@
         </p:nvSpPr>
         <p:spPr>
           <a:xfrm>
-            <a:off x="685800" y="4343400"/>
-            <a:ext cx="5486400" cy="4114800"/>
+            <a:off x="685800" y="4400550"/>
+            <a:ext cx="5486400" cy="3600450"/>
           </a:xfrm>
           <a:prstGeom prst="rect">
             <a:avLst/>
@@ -295,44 +314,43 @@
           <a:p>
             <a:pPr lvl="0"/>
             <a:r>
-              <a:rPr lang="en-US" smtClean="0"/>
-              <a:t>Click to edit Master text styles</a:t>
+              <a:rPr lang="ko-KR" altLang="en-US"/>
+              <a:t>마스터 텍스트 스타일을 편집하려면 클릭</a:t>
             </a:r>
           </a:p>
           <a:p>
             <a:pPr lvl="1"/>
             <a:r>
-              <a:rPr lang="en-US" smtClean="0"/>
-              <a:t>Second level</a:t>
+              <a:rPr lang="ko-KR" altLang="en-US"/>
+              <a:t>두 번째 수준</a:t>
             </a:r>
           </a:p>
           <a:p>
             <a:pPr lvl="2"/>
             <a:r>
-              <a:rPr lang="en-US" smtClean="0"/>
-              <a:t>Third level</a:t>
+              <a:rPr lang="ko-KR" altLang="en-US"/>
+              <a:t>세 번째 수준</a:t>
             </a:r>
           </a:p>
           <a:p>
             <a:pPr lvl="3"/>
             <a:r>
-              <a:rPr lang="en-US" smtClean="0"/>
-              <a:t>Fourth level</a:t>
+              <a:rPr lang="ko-KR" altLang="en-US"/>
+              <a:t>네 번째 수준</a:t>
             </a:r>
           </a:p>
           <a:p>
             <a:pPr lvl="4"/>
             <a:r>
-              <a:rPr lang="en-US" smtClean="0"/>
-              <a:t>Fifth level</a:t>
-            </a:r>
-            <a:endParaRPr lang="en-US"/>
-          </a:p>
-        </p:txBody>
-      </p:sp>
-      <p:sp>
-        <p:nvSpPr>
-          <p:cNvPr id="6" name="Footer Placeholder 5"/>
+              <a:rPr lang="ko-KR" altLang="en-US"/>
+              <a:t>다섯 번째 수준</a:t>
+            </a:r>
+          </a:p>
+        </p:txBody>
+      </p:sp>
+      <p:sp>
+        <p:nvSpPr>
+          <p:cNvPr id="6" name="바닥글 개체 틀 5"/>
           <p:cNvSpPr>
             <a:spLocks noGrp="1"/>
           </p:cNvSpPr>
@@ -343,7 +361,7 @@
         <p:spPr>
           <a:xfrm>
             <a:off x="0" y="8685213"/>
-            <a:ext cx="2971800" cy="457200"/>
+            <a:ext cx="2971800" cy="458787"/>
           </a:xfrm>
           <a:prstGeom prst="rect">
             <a:avLst/>
@@ -357,13 +375,13 @@
             </a:lvl1pPr>
           </a:lstStyle>
           <a:p>
-            <a:endParaRPr lang="en-US"/>
-          </a:p>
-        </p:txBody>
-      </p:sp>
-      <p:sp>
-        <p:nvSpPr>
-          <p:cNvPr id="7" name="Slide Number Placeholder 6"/>
+            <a:endParaRPr lang="ko-KR" altLang="en-US"/>
+          </a:p>
+        </p:txBody>
+      </p:sp>
+      <p:sp>
+        <p:nvSpPr>
+          <p:cNvPr id="7" name="슬라이드 번호 개체 틀 6"/>
           <p:cNvSpPr>
             <a:spLocks noGrp="1"/>
           </p:cNvSpPr>
@@ -374,7 +392,7 @@
         <p:spPr>
           <a:xfrm>
             <a:off x="3884613" y="8685213"/>
-            <a:ext cx="2971800" cy="457200"/>
+            <a:ext cx="2971800" cy="458787"/>
           </a:xfrm>
           <a:prstGeom prst="rect">
             <a:avLst/>
@@ -388,24 +406,24 @@
             </a:lvl1pPr>
           </a:lstStyle>
           <a:p>
-            <a:fld id="{BB5E49A5-4136-284D-997B-48E1D791AD67}" type="slidenum">
-              <a:rPr lang="en-US" smtClean="0"/>
+            <a:fld id="{622E512C-CD54-4914-A159-AE3A63464914}" type="slidenum">
+              <a:rPr lang="ko-KR" altLang="en-US" smtClean="0"/>
               <a:t>‹#›</a:t>
             </a:fld>
-            <a:endParaRPr lang="en-US"/>
+            <a:endParaRPr lang="ko-KR" altLang="en-US"/>
           </a:p>
         </p:txBody>
       </p:sp>
     </p:spTree>
     <p:extLst>
       <p:ext uri="{BB962C8B-B14F-4D97-AF65-F5344CB8AC3E}">
-        <p14:creationId xmlns:p14="http://schemas.microsoft.com/office/powerpoint/2010/main" val="2623252185"/>
+        <p14:creationId xmlns:p14="http://schemas.microsoft.com/office/powerpoint/2010/main" val="498467443"/>
       </p:ext>
     </p:extLst>
   </p:cSld>
   <p:clrMap bg1="lt1" tx1="dk1" bg2="lt2" tx2="dk2" accent1="accent1" accent2="accent2" accent3="accent3" accent4="accent4" accent5="accent5" accent6="accent6" hlink="hlink" folHlink="folHlink"/>
   <p:notesStyle>
-    <a:lvl1pPr marL="0" algn="l" defTabSz="457200" rtl="0" eaLnBrk="1" latinLnBrk="0" hangingPunct="1">
+    <a:lvl1pPr marL="0" algn="l" defTabSz="914400" rtl="0" eaLnBrk="1" latinLnBrk="1" hangingPunct="1">
       <a:defRPr sz="1200" kern="1200">
         <a:solidFill>
           <a:schemeClr val="tx1"/>
@@ -415,7 +433,7 @@
         <a:cs typeface="+mn-cs"/>
       </a:defRPr>
     </a:lvl1pPr>
-    <a:lvl2pPr marL="457200" algn="l" defTabSz="457200" rtl="0" eaLnBrk="1" latinLnBrk="0" hangingPunct="1">
+    <a:lvl2pPr marL="457200" algn="l" defTabSz="914400" rtl="0" eaLnBrk="1" latinLnBrk="1" hangingPunct="1">
       <a:defRPr sz="1200" kern="1200">
         <a:solidFill>
           <a:schemeClr val="tx1"/>
@@ -425,7 +443,7 @@
         <a:cs typeface="+mn-cs"/>
       </a:defRPr>
     </a:lvl2pPr>
-    <a:lvl3pPr marL="914400" algn="l" defTabSz="457200" rtl="0" eaLnBrk="1" latinLnBrk="0" hangingPunct="1">
+    <a:lvl3pPr marL="914400" algn="l" defTabSz="914400" rtl="0" eaLnBrk="1" latinLnBrk="1" hangingPunct="1">
       <a:defRPr sz="1200" kern="1200">
         <a:solidFill>
           <a:schemeClr val="tx1"/>
@@ -435,7 +453,7 @@
         <a:cs typeface="+mn-cs"/>
       </a:defRPr>
     </a:lvl3pPr>
-    <a:lvl4pPr marL="1371600" algn="l" defTabSz="457200" rtl="0" eaLnBrk="1" latinLnBrk="0" hangingPunct="1">
+    <a:lvl4pPr marL="1371600" algn="l" defTabSz="914400" rtl="0" eaLnBrk="1" latinLnBrk="1" hangingPunct="1">
       <a:defRPr sz="1200" kern="1200">
         <a:solidFill>
           <a:schemeClr val="tx1"/>
@@ -445,7 +463,7 @@
         <a:cs typeface="+mn-cs"/>
       </a:defRPr>
     </a:lvl4pPr>
-    <a:lvl5pPr marL="1828800" algn="l" defTabSz="457200" rtl="0" eaLnBrk="1" latinLnBrk="0" hangingPunct="1">
+    <a:lvl5pPr marL="1828800" algn="l" defTabSz="914400" rtl="0" eaLnBrk="1" latinLnBrk="1" hangingPunct="1">
       <a:defRPr sz="1200" kern="1200">
         <a:solidFill>
           <a:schemeClr val="tx1"/>
@@ -455,7 +473,7 @@
         <a:cs typeface="+mn-cs"/>
       </a:defRPr>
     </a:lvl5pPr>
-    <a:lvl6pPr marL="2286000" algn="l" defTabSz="457200" rtl="0" eaLnBrk="1" latinLnBrk="0" hangingPunct="1">
+    <a:lvl6pPr marL="2286000" algn="l" defTabSz="914400" rtl="0" eaLnBrk="1" latinLnBrk="1" hangingPunct="1">
       <a:defRPr sz="1200" kern="1200">
         <a:solidFill>
           <a:schemeClr val="tx1"/>
@@ -465,7 +483,7 @@
         <a:cs typeface="+mn-cs"/>
       </a:defRPr>
     </a:lvl6pPr>
-    <a:lvl7pPr marL="2743200" algn="l" defTabSz="457200" rtl="0" eaLnBrk="1" latinLnBrk="0" hangingPunct="1">
+    <a:lvl7pPr marL="2743200" algn="l" defTabSz="914400" rtl="0" eaLnBrk="1" latinLnBrk="1" hangingPunct="1">
       <a:defRPr sz="1200" kern="1200">
         <a:solidFill>
           <a:schemeClr val="tx1"/>
@@ -475,7 +493,7 @@
         <a:cs typeface="+mn-cs"/>
       </a:defRPr>
     </a:lvl7pPr>
-    <a:lvl8pPr marL="3200400" algn="l" defTabSz="457200" rtl="0" eaLnBrk="1" latinLnBrk="0" hangingPunct="1">
+    <a:lvl8pPr marL="3200400" algn="l" defTabSz="914400" rtl="0" eaLnBrk="1" latinLnBrk="1" hangingPunct="1">
       <a:defRPr sz="1200" kern="1200">
         <a:solidFill>
           <a:schemeClr val="tx1"/>
@@ -485,7 +503,7 @@
         <a:cs typeface="+mn-cs"/>
       </a:defRPr>
     </a:lvl8pPr>
-    <a:lvl9pPr marL="3657600" algn="l" defTabSz="457200" rtl="0" eaLnBrk="1" latinLnBrk="0" hangingPunct="1">
+    <a:lvl9pPr marL="3657600" algn="l" defTabSz="914400" rtl="0" eaLnBrk="1" latinLnBrk="1" hangingPunct="1">
       <a:defRPr sz="1200" kern="1200">
         <a:solidFill>
           <a:schemeClr val="tx1"/>
@@ -500,7 +518,7 @@
 </file>
 
 <file path=ppt/notesSlides/notesSlide1.xml><?xml version="1.0" encoding="utf-8"?>
-<p:notes xmlns:a="http://schemas.openxmlformats.org/drawingml/2006/main" xmlns:p="http://schemas.openxmlformats.org/presentationml/2006/main" xmlns:r="http://schemas.openxmlformats.org/officeDocument/2006/relationships">
+<p:notes xmlns:a="http://schemas.openxmlformats.org/drawingml/2006/main" xmlns:r="http://schemas.openxmlformats.org/officeDocument/2006/relationships" xmlns:p="http://schemas.openxmlformats.org/presentationml/2006/main">
   <p:cSld>
     <p:spTree>
       <p:nvGrpSpPr>
@@ -520,7 +538,7 @@
         <p:nvSpPr>
           <p:cNvPr id="2" name="Slide Image Placeholder 1"/>
           <p:cNvSpPr>
-            <a:spLocks noGrp="1"/>
+            <a:spLocks noGrp="1" noRot="1" noChangeAspect="1"/>
           </p:cNvSpPr>
           <p:nvPr>
             <p:ph type="sldImg" idx="2"/>
@@ -535,7 +553,7 @@
             <a:spLocks noGrp="1"/>
           </p:cNvSpPr>
           <p:nvPr>
-            <p:ph type="body" idx="3" sz="quarter"/>
+            <p:ph type="body" sz="quarter" idx="3"/>
           </p:nvPr>
         </p:nvSpPr>
         <p:spPr/>
@@ -556,7 +574,7 @@
             <a:spLocks noGrp="1"/>
           </p:cNvSpPr>
           <p:nvPr>
-            <p:ph type="sldNum" idx="5" sz="quarter"/>
+            <p:ph type="sldNum" sz="quarter" idx="5"/>
           </p:nvPr>
         </p:nvSpPr>
         <p:spPr/>
@@ -570,7 +588,7 @@
 </file>
 
 <file path=ppt/notesSlides/notesSlide10.xml><?xml version="1.0" encoding="utf-8"?>
-<p:notes xmlns:a="http://schemas.openxmlformats.org/drawingml/2006/main" xmlns:p="http://schemas.openxmlformats.org/presentationml/2006/main" xmlns:r="http://schemas.openxmlformats.org/officeDocument/2006/relationships">
+<p:notes xmlns:a="http://schemas.openxmlformats.org/drawingml/2006/main" xmlns:r="http://schemas.openxmlformats.org/officeDocument/2006/relationships" xmlns:p="http://schemas.openxmlformats.org/presentationml/2006/main">
   <p:cSld>
     <p:spTree>
       <p:nvGrpSpPr>
@@ -590,7 +608,7 @@
         <p:nvSpPr>
           <p:cNvPr id="2" name="Slide Image Placeholder 1"/>
           <p:cNvSpPr>
-            <a:spLocks noGrp="1"/>
+            <a:spLocks noGrp="1" noRot="1" noChangeAspect="1"/>
           </p:cNvSpPr>
           <p:nvPr>
             <p:ph type="sldImg" idx="2"/>
@@ -605,7 +623,7 @@
             <a:spLocks noGrp="1"/>
           </p:cNvSpPr>
           <p:nvPr>
-            <p:ph type="body" idx="3" sz="quarter"/>
+            <p:ph type="body" sz="quarter" idx="3"/>
           </p:nvPr>
         </p:nvSpPr>
         <p:spPr/>
@@ -626,7 +644,7 @@
             <a:spLocks noGrp="1"/>
           </p:cNvSpPr>
           <p:nvPr>
-            <p:ph type="sldNum" idx="5" sz="quarter"/>
+            <p:ph type="sldNum" sz="quarter" idx="5"/>
           </p:nvPr>
         </p:nvSpPr>
         <p:spPr/>
@@ -640,7 +658,7 @@
 </file>
 
 <file path=ppt/notesSlides/notesSlide11.xml><?xml version="1.0" encoding="utf-8"?>
-<p:notes xmlns:a="http://schemas.openxmlformats.org/drawingml/2006/main" xmlns:p="http://schemas.openxmlformats.org/presentationml/2006/main" xmlns:r="http://schemas.openxmlformats.org/officeDocument/2006/relationships">
+<p:notes xmlns:a="http://schemas.openxmlformats.org/drawingml/2006/main" xmlns:r="http://schemas.openxmlformats.org/officeDocument/2006/relationships" xmlns:p="http://schemas.openxmlformats.org/presentationml/2006/main">
   <p:cSld>
     <p:spTree>
       <p:nvGrpSpPr>
@@ -660,7 +678,7 @@
         <p:nvSpPr>
           <p:cNvPr id="2" name="Slide Image Placeholder 1"/>
           <p:cNvSpPr>
-            <a:spLocks noGrp="1"/>
+            <a:spLocks noGrp="1" noRot="1" noChangeAspect="1"/>
           </p:cNvSpPr>
           <p:nvPr>
             <p:ph type="sldImg" idx="2"/>
@@ -675,7 +693,7 @@
             <a:spLocks noGrp="1"/>
           </p:cNvSpPr>
           <p:nvPr>
-            <p:ph type="body" idx="3" sz="quarter"/>
+            <p:ph type="body" sz="quarter" idx="3"/>
           </p:nvPr>
         </p:nvSpPr>
         <p:spPr/>
@@ -696,7 +714,7 @@
             <a:spLocks noGrp="1"/>
           </p:cNvSpPr>
           <p:nvPr>
-            <p:ph type="sldNum" idx="5" sz="quarter"/>
+            <p:ph type="sldNum" sz="quarter" idx="5"/>
           </p:nvPr>
         </p:nvSpPr>
         <p:spPr/>
@@ -710,7 +728,7 @@
 </file>
 
 <file path=ppt/notesSlides/notesSlide12.xml><?xml version="1.0" encoding="utf-8"?>
-<p:notes xmlns:a="http://schemas.openxmlformats.org/drawingml/2006/main" xmlns:p="http://schemas.openxmlformats.org/presentationml/2006/main" xmlns:r="http://schemas.openxmlformats.org/officeDocument/2006/relationships">
+<p:notes xmlns:a="http://schemas.openxmlformats.org/drawingml/2006/main" xmlns:r="http://schemas.openxmlformats.org/officeDocument/2006/relationships" xmlns:p="http://schemas.openxmlformats.org/presentationml/2006/main">
   <p:cSld>
     <p:spTree>
       <p:nvGrpSpPr>
@@ -730,7 +748,7 @@
         <p:nvSpPr>
           <p:cNvPr id="2" name="Slide Image Placeholder 1"/>
           <p:cNvSpPr>
-            <a:spLocks noGrp="1"/>
+            <a:spLocks noGrp="1" noRot="1" noChangeAspect="1"/>
           </p:cNvSpPr>
           <p:nvPr>
             <p:ph type="sldImg" idx="2"/>
@@ -745,7 +763,7 @@
             <a:spLocks noGrp="1"/>
           </p:cNvSpPr>
           <p:nvPr>
-            <p:ph type="body" idx="3" sz="quarter"/>
+            <p:ph type="body" sz="quarter" idx="3"/>
           </p:nvPr>
         </p:nvSpPr>
         <p:spPr/>
@@ -766,7 +784,7 @@
             <a:spLocks noGrp="1"/>
           </p:cNvSpPr>
           <p:nvPr>
-            <p:ph type="sldNum" idx="5" sz="quarter"/>
+            <p:ph type="sldNum" sz="quarter" idx="5"/>
           </p:nvPr>
         </p:nvSpPr>
         <p:spPr/>
@@ -780,7 +798,7 @@
 </file>
 
 <file path=ppt/notesSlides/notesSlide13.xml><?xml version="1.0" encoding="utf-8"?>
-<p:notes xmlns:a="http://schemas.openxmlformats.org/drawingml/2006/main" xmlns:p="http://schemas.openxmlformats.org/presentationml/2006/main" xmlns:r="http://schemas.openxmlformats.org/officeDocument/2006/relationships">
+<p:notes xmlns:a="http://schemas.openxmlformats.org/drawingml/2006/main" xmlns:r="http://schemas.openxmlformats.org/officeDocument/2006/relationships" xmlns:p="http://schemas.openxmlformats.org/presentationml/2006/main">
   <p:cSld>
     <p:spTree>
       <p:nvGrpSpPr>
@@ -800,7 +818,7 @@
         <p:nvSpPr>
           <p:cNvPr id="2" name="Slide Image Placeholder 1"/>
           <p:cNvSpPr>
-            <a:spLocks noGrp="1"/>
+            <a:spLocks noGrp="1" noRot="1" noChangeAspect="1"/>
           </p:cNvSpPr>
           <p:nvPr>
             <p:ph type="sldImg" idx="2"/>
@@ -815,7 +833,7 @@
             <a:spLocks noGrp="1"/>
           </p:cNvSpPr>
           <p:nvPr>
-            <p:ph type="body" idx="3" sz="quarter"/>
+            <p:ph type="body" sz="quarter" idx="3"/>
           </p:nvPr>
         </p:nvSpPr>
         <p:spPr/>
@@ -836,7 +854,7 @@
             <a:spLocks noGrp="1"/>
           </p:cNvSpPr>
           <p:nvPr>
-            <p:ph type="sldNum" idx="5" sz="quarter"/>
+            <p:ph type="sldNum" sz="quarter" idx="5"/>
           </p:nvPr>
         </p:nvSpPr>
         <p:spPr/>
@@ -850,7 +868,7 @@
 </file>
 
 <file path=ppt/notesSlides/notesSlide14.xml><?xml version="1.0" encoding="utf-8"?>
-<p:notes xmlns:a="http://schemas.openxmlformats.org/drawingml/2006/main" xmlns:p="http://schemas.openxmlformats.org/presentationml/2006/main" xmlns:r="http://schemas.openxmlformats.org/officeDocument/2006/relationships">
+<p:notes xmlns:a="http://schemas.openxmlformats.org/drawingml/2006/main" xmlns:r="http://schemas.openxmlformats.org/officeDocument/2006/relationships" xmlns:p="http://schemas.openxmlformats.org/presentationml/2006/main">
   <p:cSld>
     <p:spTree>
       <p:nvGrpSpPr>
@@ -870,7 +888,7 @@
         <p:nvSpPr>
           <p:cNvPr id="2" name="Slide Image Placeholder 1"/>
           <p:cNvSpPr>
-            <a:spLocks noGrp="1"/>
+            <a:spLocks noGrp="1" noRot="1" noChangeAspect="1"/>
           </p:cNvSpPr>
           <p:nvPr>
             <p:ph type="sldImg" idx="2"/>
@@ -885,7 +903,7 @@
             <a:spLocks noGrp="1"/>
           </p:cNvSpPr>
           <p:nvPr>
-            <p:ph type="body" idx="3" sz="quarter"/>
+            <p:ph type="body" sz="quarter" idx="3"/>
           </p:nvPr>
         </p:nvSpPr>
         <p:spPr/>
@@ -906,7 +924,7 @@
             <a:spLocks noGrp="1"/>
           </p:cNvSpPr>
           <p:nvPr>
-            <p:ph type="sldNum" idx="5" sz="quarter"/>
+            <p:ph type="sldNum" sz="quarter" idx="5"/>
           </p:nvPr>
         </p:nvSpPr>
         <p:spPr/>
@@ -920,7 +938,7 @@
 </file>
 
 <file path=ppt/notesSlides/notesSlide15.xml><?xml version="1.0" encoding="utf-8"?>
-<p:notes xmlns:a="http://schemas.openxmlformats.org/drawingml/2006/main" xmlns:p="http://schemas.openxmlformats.org/presentationml/2006/main" xmlns:r="http://schemas.openxmlformats.org/officeDocument/2006/relationships">
+<p:notes xmlns:a="http://schemas.openxmlformats.org/drawingml/2006/main" xmlns:r="http://schemas.openxmlformats.org/officeDocument/2006/relationships" xmlns:p="http://schemas.openxmlformats.org/presentationml/2006/main">
   <p:cSld>
     <p:spTree>
       <p:nvGrpSpPr>
@@ -940,7 +958,7 @@
         <p:nvSpPr>
           <p:cNvPr id="2" name="Slide Image Placeholder 1"/>
           <p:cNvSpPr>
-            <a:spLocks noGrp="1"/>
+            <a:spLocks noGrp="1" noRot="1" noChangeAspect="1"/>
           </p:cNvSpPr>
           <p:nvPr>
             <p:ph type="sldImg" idx="2"/>
@@ -955,7 +973,7 @@
             <a:spLocks noGrp="1"/>
           </p:cNvSpPr>
           <p:nvPr>
-            <p:ph type="body" idx="3" sz="quarter"/>
+            <p:ph type="body" sz="quarter" idx="3"/>
           </p:nvPr>
         </p:nvSpPr>
         <p:spPr/>
@@ -976,7 +994,7 @@
             <a:spLocks noGrp="1"/>
           </p:cNvSpPr>
           <p:nvPr>
-            <p:ph type="sldNum" idx="5" sz="quarter"/>
+            <p:ph type="sldNum" sz="quarter" idx="5"/>
           </p:nvPr>
         </p:nvSpPr>
         <p:spPr/>
@@ -990,7 +1008,7 @@
 </file>
 
 <file path=ppt/notesSlides/notesSlide16.xml><?xml version="1.0" encoding="utf-8"?>
-<p:notes xmlns:a="http://schemas.openxmlformats.org/drawingml/2006/main" xmlns:p="http://schemas.openxmlformats.org/presentationml/2006/main" xmlns:r="http://schemas.openxmlformats.org/officeDocument/2006/relationships">
+<p:notes xmlns:a="http://schemas.openxmlformats.org/drawingml/2006/main" xmlns:r="http://schemas.openxmlformats.org/officeDocument/2006/relationships" xmlns:p="http://schemas.openxmlformats.org/presentationml/2006/main">
   <p:cSld>
     <p:spTree>
       <p:nvGrpSpPr>
@@ -1010,7 +1028,7 @@
         <p:nvSpPr>
           <p:cNvPr id="2" name="Slide Image Placeholder 1"/>
           <p:cNvSpPr>
-            <a:spLocks noGrp="1"/>
+            <a:spLocks noGrp="1" noRot="1" noChangeAspect="1"/>
           </p:cNvSpPr>
           <p:nvPr>
             <p:ph type="sldImg" idx="2"/>
@@ -1025,7 +1043,7 @@
             <a:spLocks noGrp="1"/>
           </p:cNvSpPr>
           <p:nvPr>
-            <p:ph type="body" idx="3" sz="quarter"/>
+            <p:ph type="body" sz="quarter" idx="3"/>
           </p:nvPr>
         </p:nvSpPr>
         <p:spPr/>
@@ -1046,7 +1064,7 @@
             <a:spLocks noGrp="1"/>
           </p:cNvSpPr>
           <p:nvPr>
-            <p:ph type="sldNum" idx="5" sz="quarter"/>
+            <p:ph type="sldNum" sz="quarter" idx="5"/>
           </p:nvPr>
         </p:nvSpPr>
         <p:spPr/>
@@ -1060,7 +1078,7 @@
 </file>
 
 <file path=ppt/notesSlides/notesSlide17.xml><?xml version="1.0" encoding="utf-8"?>
-<p:notes xmlns:a="http://schemas.openxmlformats.org/drawingml/2006/main" xmlns:p="http://schemas.openxmlformats.org/presentationml/2006/main" xmlns:r="http://schemas.openxmlformats.org/officeDocument/2006/relationships">
+<p:notes xmlns:a="http://schemas.openxmlformats.org/drawingml/2006/main" xmlns:r="http://schemas.openxmlformats.org/officeDocument/2006/relationships" xmlns:p="http://schemas.openxmlformats.org/presentationml/2006/main">
   <p:cSld>
     <p:spTree>
       <p:nvGrpSpPr>
@@ -1080,7 +1098,7 @@
         <p:nvSpPr>
           <p:cNvPr id="2" name="Slide Image Placeholder 1"/>
           <p:cNvSpPr>
-            <a:spLocks noGrp="1"/>
+            <a:spLocks noGrp="1" noRot="1" noChangeAspect="1"/>
           </p:cNvSpPr>
           <p:nvPr>
             <p:ph type="sldImg" idx="2"/>
@@ -1095,7 +1113,7 @@
             <a:spLocks noGrp="1"/>
           </p:cNvSpPr>
           <p:nvPr>
-            <p:ph type="body" idx="3" sz="quarter"/>
+            <p:ph type="body" sz="quarter" idx="3"/>
           </p:nvPr>
         </p:nvSpPr>
         <p:spPr/>
@@ -1116,7 +1134,7 @@
             <a:spLocks noGrp="1"/>
           </p:cNvSpPr>
           <p:nvPr>
-            <p:ph type="sldNum" idx="5" sz="quarter"/>
+            <p:ph type="sldNum" sz="quarter" idx="5"/>
           </p:nvPr>
         </p:nvSpPr>
         <p:spPr/>
@@ -1130,7 +1148,7 @@
 </file>
 
 <file path=ppt/notesSlides/notesSlide18.xml><?xml version="1.0" encoding="utf-8"?>
-<p:notes xmlns:a="http://schemas.openxmlformats.org/drawingml/2006/main" xmlns:p="http://schemas.openxmlformats.org/presentationml/2006/main" xmlns:r="http://schemas.openxmlformats.org/officeDocument/2006/relationships">
+<p:notes xmlns:a="http://schemas.openxmlformats.org/drawingml/2006/main" xmlns:r="http://schemas.openxmlformats.org/officeDocument/2006/relationships" xmlns:p="http://schemas.openxmlformats.org/presentationml/2006/main">
   <p:cSld>
     <p:spTree>
       <p:nvGrpSpPr>
@@ -1150,7 +1168,7 @@
         <p:nvSpPr>
           <p:cNvPr id="2" name="Slide Image Placeholder 1"/>
           <p:cNvSpPr>
-            <a:spLocks noGrp="1"/>
+            <a:spLocks noGrp="1" noRot="1" noChangeAspect="1"/>
           </p:cNvSpPr>
           <p:nvPr>
             <p:ph type="sldImg" idx="2"/>
@@ -1165,7 +1183,7 @@
             <a:spLocks noGrp="1"/>
           </p:cNvSpPr>
           <p:nvPr>
-            <p:ph type="body" idx="3" sz="quarter"/>
+            <p:ph type="body" sz="quarter" idx="3"/>
           </p:nvPr>
         </p:nvSpPr>
         <p:spPr/>
@@ -1186,7 +1204,7 @@
             <a:spLocks noGrp="1"/>
           </p:cNvSpPr>
           <p:nvPr>
-            <p:ph type="sldNum" idx="5" sz="quarter"/>
+            <p:ph type="sldNum" sz="quarter" idx="5"/>
           </p:nvPr>
         </p:nvSpPr>
         <p:spPr/>
@@ -1200,7 +1218,7 @@
 </file>
 
 <file path=ppt/notesSlides/notesSlide19.xml><?xml version="1.0" encoding="utf-8"?>
-<p:notes xmlns:a="http://schemas.openxmlformats.org/drawingml/2006/main" xmlns:p="http://schemas.openxmlformats.org/presentationml/2006/main" xmlns:r="http://schemas.openxmlformats.org/officeDocument/2006/relationships">
+<p:notes xmlns:a="http://schemas.openxmlformats.org/drawingml/2006/main" xmlns:r="http://schemas.openxmlformats.org/officeDocument/2006/relationships" xmlns:p="http://schemas.openxmlformats.org/presentationml/2006/main">
   <p:cSld>
     <p:spTree>
       <p:nvGrpSpPr>
@@ -1220,7 +1238,7 @@
         <p:nvSpPr>
           <p:cNvPr id="2" name="Slide Image Placeholder 1"/>
           <p:cNvSpPr>
-            <a:spLocks noGrp="1"/>
+            <a:spLocks noGrp="1" noRot="1" noChangeAspect="1"/>
           </p:cNvSpPr>
           <p:nvPr>
             <p:ph type="sldImg" idx="2"/>
@@ -1235,7 +1253,7 @@
             <a:spLocks noGrp="1"/>
           </p:cNvSpPr>
           <p:nvPr>
-            <p:ph type="body" idx="3" sz="quarter"/>
+            <p:ph type="body" sz="quarter" idx="3"/>
           </p:nvPr>
         </p:nvSpPr>
         <p:spPr/>
@@ -1256,7 +1274,7 @@
             <a:spLocks noGrp="1"/>
           </p:cNvSpPr>
           <p:nvPr>
-            <p:ph type="sldNum" idx="5" sz="quarter"/>
+            <p:ph type="sldNum" sz="quarter" idx="5"/>
           </p:nvPr>
         </p:nvSpPr>
         <p:spPr/>
@@ -1270,7 +1288,7 @@
 </file>
 
 <file path=ppt/notesSlides/notesSlide2.xml><?xml version="1.0" encoding="utf-8"?>
-<p:notes xmlns:a="http://schemas.openxmlformats.org/drawingml/2006/main" xmlns:p="http://schemas.openxmlformats.org/presentationml/2006/main" xmlns:r="http://schemas.openxmlformats.org/officeDocument/2006/relationships">
+<p:notes xmlns:a="http://schemas.openxmlformats.org/drawingml/2006/main" xmlns:r="http://schemas.openxmlformats.org/officeDocument/2006/relationships" xmlns:p="http://schemas.openxmlformats.org/presentationml/2006/main">
   <p:cSld>
     <p:spTree>
       <p:nvGrpSpPr>
@@ -1290,7 +1308,7 @@
         <p:nvSpPr>
           <p:cNvPr id="2" name="Slide Image Placeholder 1"/>
           <p:cNvSpPr>
-            <a:spLocks noGrp="1"/>
+            <a:spLocks noGrp="1" noRot="1" noChangeAspect="1"/>
           </p:cNvSpPr>
           <p:nvPr>
             <p:ph type="sldImg" idx="2"/>
@@ -1305,7 +1323,7 @@
             <a:spLocks noGrp="1"/>
           </p:cNvSpPr>
           <p:nvPr>
-            <p:ph type="body" idx="3" sz="quarter"/>
+            <p:ph type="body" sz="quarter" idx="3"/>
           </p:nvPr>
         </p:nvSpPr>
         <p:spPr/>
@@ -1326,7 +1344,7 @@
             <a:spLocks noGrp="1"/>
           </p:cNvSpPr>
           <p:nvPr>
-            <p:ph type="sldNum" idx="5" sz="quarter"/>
+            <p:ph type="sldNum" sz="quarter" idx="5"/>
           </p:nvPr>
         </p:nvSpPr>
         <p:spPr/>
@@ -1340,7 +1358,7 @@
 </file>
 
 <file path=ppt/notesSlides/notesSlide20.xml><?xml version="1.0" encoding="utf-8"?>
-<p:notes xmlns:a="http://schemas.openxmlformats.org/drawingml/2006/main" xmlns:p="http://schemas.openxmlformats.org/presentationml/2006/main" xmlns:r="http://schemas.openxmlformats.org/officeDocument/2006/relationships">
+<p:notes xmlns:a="http://schemas.openxmlformats.org/drawingml/2006/main" xmlns:r="http://schemas.openxmlformats.org/officeDocument/2006/relationships" xmlns:p="http://schemas.openxmlformats.org/presentationml/2006/main">
   <p:cSld>
     <p:spTree>
       <p:nvGrpSpPr>
@@ -1360,7 +1378,7 @@
         <p:nvSpPr>
           <p:cNvPr id="2" name="Slide Image Placeholder 1"/>
           <p:cNvSpPr>
-            <a:spLocks noGrp="1"/>
+            <a:spLocks noGrp="1" noRot="1" noChangeAspect="1"/>
           </p:cNvSpPr>
           <p:nvPr>
             <p:ph type="sldImg" idx="2"/>
@@ -1375,7 +1393,7 @@
             <a:spLocks noGrp="1"/>
           </p:cNvSpPr>
           <p:nvPr>
-            <p:ph type="body" idx="3" sz="quarter"/>
+            <p:ph type="body" sz="quarter" idx="3"/>
           </p:nvPr>
         </p:nvSpPr>
         <p:spPr/>
@@ -1396,7 +1414,7 @@
             <a:spLocks noGrp="1"/>
           </p:cNvSpPr>
           <p:nvPr>
-            <p:ph type="sldNum" idx="5" sz="quarter"/>
+            <p:ph type="sldNum" sz="quarter" idx="5"/>
           </p:nvPr>
         </p:nvSpPr>
         <p:spPr/>
@@ -1410,7 +1428,7 @@
 </file>
 
 <file path=ppt/notesSlides/notesSlide21.xml><?xml version="1.0" encoding="utf-8"?>
-<p:notes xmlns:a="http://schemas.openxmlformats.org/drawingml/2006/main" xmlns:p="http://schemas.openxmlformats.org/presentationml/2006/main" xmlns:r="http://schemas.openxmlformats.org/officeDocument/2006/relationships">
+<p:notes xmlns:a="http://schemas.openxmlformats.org/drawingml/2006/main" xmlns:r="http://schemas.openxmlformats.org/officeDocument/2006/relationships" xmlns:p="http://schemas.openxmlformats.org/presentationml/2006/main">
   <p:cSld>
     <p:spTree>
       <p:nvGrpSpPr>
@@ -1430,7 +1448,7 @@
         <p:nvSpPr>
           <p:cNvPr id="2" name="Slide Image Placeholder 1"/>
           <p:cNvSpPr>
-            <a:spLocks noGrp="1"/>
+            <a:spLocks noGrp="1" noRot="1" noChangeAspect="1"/>
           </p:cNvSpPr>
           <p:nvPr>
             <p:ph type="sldImg" idx="2"/>
@@ -1445,7 +1463,7 @@
             <a:spLocks noGrp="1"/>
           </p:cNvSpPr>
           <p:nvPr>
-            <p:ph type="body" idx="3" sz="quarter"/>
+            <p:ph type="body" sz="quarter" idx="3"/>
           </p:nvPr>
         </p:nvSpPr>
         <p:spPr/>
@@ -1466,7 +1484,7 @@
             <a:spLocks noGrp="1"/>
           </p:cNvSpPr>
           <p:nvPr>
-            <p:ph type="sldNum" idx="5" sz="quarter"/>
+            <p:ph type="sldNum" sz="quarter" idx="5"/>
           </p:nvPr>
         </p:nvSpPr>
         <p:spPr/>
@@ -1480,7 +1498,7 @@
 </file>
 
 <file path=ppt/notesSlides/notesSlide22.xml><?xml version="1.0" encoding="utf-8"?>
-<p:notes xmlns:a="http://schemas.openxmlformats.org/drawingml/2006/main" xmlns:p="http://schemas.openxmlformats.org/presentationml/2006/main" xmlns:r="http://schemas.openxmlformats.org/officeDocument/2006/relationships">
+<p:notes xmlns:a="http://schemas.openxmlformats.org/drawingml/2006/main" xmlns:r="http://schemas.openxmlformats.org/officeDocument/2006/relationships" xmlns:p="http://schemas.openxmlformats.org/presentationml/2006/main">
   <p:cSld>
     <p:spTree>
       <p:nvGrpSpPr>
@@ -1500,7 +1518,7 @@
         <p:nvSpPr>
           <p:cNvPr id="2" name="Slide Image Placeholder 1"/>
           <p:cNvSpPr>
-            <a:spLocks noGrp="1"/>
+            <a:spLocks noGrp="1" noRot="1" noChangeAspect="1"/>
           </p:cNvSpPr>
           <p:nvPr>
             <p:ph type="sldImg" idx="2"/>
@@ -1515,7 +1533,7 @@
             <a:spLocks noGrp="1"/>
           </p:cNvSpPr>
           <p:nvPr>
-            <p:ph type="body" idx="3" sz="quarter"/>
+            <p:ph type="body" sz="quarter" idx="3"/>
           </p:nvPr>
         </p:nvSpPr>
         <p:spPr/>
@@ -1536,7 +1554,7 @@
             <a:spLocks noGrp="1"/>
           </p:cNvSpPr>
           <p:nvPr>
-            <p:ph type="sldNum" idx="5" sz="quarter"/>
+            <p:ph type="sldNum" sz="quarter" idx="5"/>
           </p:nvPr>
         </p:nvSpPr>
         <p:spPr/>
@@ -1550,7 +1568,7 @@
 </file>
 
 <file path=ppt/notesSlides/notesSlide23.xml><?xml version="1.0" encoding="utf-8"?>
-<p:notes xmlns:a="http://schemas.openxmlformats.org/drawingml/2006/main" xmlns:p="http://schemas.openxmlformats.org/presentationml/2006/main" xmlns:r="http://schemas.openxmlformats.org/officeDocument/2006/relationships">
+<p:notes xmlns:a="http://schemas.openxmlformats.org/drawingml/2006/main" xmlns:r="http://schemas.openxmlformats.org/officeDocument/2006/relationships" xmlns:p="http://schemas.openxmlformats.org/presentationml/2006/main">
   <p:cSld>
     <p:spTree>
       <p:nvGrpSpPr>
@@ -1570,7 +1588,7 @@
         <p:nvSpPr>
           <p:cNvPr id="2" name="Slide Image Placeholder 1"/>
           <p:cNvSpPr>
-            <a:spLocks noGrp="1"/>
+            <a:spLocks noGrp="1" noRot="1" noChangeAspect="1"/>
           </p:cNvSpPr>
           <p:nvPr>
             <p:ph type="sldImg" idx="2"/>
@@ -1585,7 +1603,7 @@
             <a:spLocks noGrp="1"/>
           </p:cNvSpPr>
           <p:nvPr>
-            <p:ph type="body" idx="3" sz="quarter"/>
+            <p:ph type="body" sz="quarter" idx="3"/>
           </p:nvPr>
         </p:nvSpPr>
         <p:spPr/>
@@ -1606,7 +1624,7 @@
             <a:spLocks noGrp="1"/>
           </p:cNvSpPr>
           <p:nvPr>
-            <p:ph type="sldNum" idx="5" sz="quarter"/>
+            <p:ph type="sldNum" sz="quarter" idx="5"/>
           </p:nvPr>
         </p:nvSpPr>
         <p:spPr/>
@@ -1620,7 +1638,7 @@
 </file>
 
 <file path=ppt/notesSlides/notesSlide24.xml><?xml version="1.0" encoding="utf-8"?>
-<p:notes xmlns:a="http://schemas.openxmlformats.org/drawingml/2006/main" xmlns:p="http://schemas.openxmlformats.org/presentationml/2006/main" xmlns:r="http://schemas.openxmlformats.org/officeDocument/2006/relationships">
+<p:notes xmlns:a="http://schemas.openxmlformats.org/drawingml/2006/main" xmlns:r="http://schemas.openxmlformats.org/officeDocument/2006/relationships" xmlns:p="http://schemas.openxmlformats.org/presentationml/2006/main">
   <p:cSld>
     <p:spTree>
       <p:nvGrpSpPr>
@@ -1640,7 +1658,7 @@
         <p:nvSpPr>
           <p:cNvPr id="2" name="Slide Image Placeholder 1"/>
           <p:cNvSpPr>
-            <a:spLocks noGrp="1"/>
+            <a:spLocks noGrp="1" noRot="1" noChangeAspect="1"/>
           </p:cNvSpPr>
           <p:nvPr>
             <p:ph type="sldImg" idx="2"/>
@@ -1655,7 +1673,7 @@
             <a:spLocks noGrp="1"/>
           </p:cNvSpPr>
           <p:nvPr>
-            <p:ph type="body" idx="3" sz="quarter"/>
+            <p:ph type="body" sz="quarter" idx="3"/>
           </p:nvPr>
         </p:nvSpPr>
         <p:spPr/>
@@ -1676,7 +1694,7 @@
             <a:spLocks noGrp="1"/>
           </p:cNvSpPr>
           <p:nvPr>
-            <p:ph type="sldNum" idx="5" sz="quarter"/>
+            <p:ph type="sldNum" sz="quarter" idx="5"/>
           </p:nvPr>
         </p:nvSpPr>
         <p:spPr/>
@@ -1690,7 +1708,7 @@
 </file>
 
 <file path=ppt/notesSlides/notesSlide25.xml><?xml version="1.0" encoding="utf-8"?>
-<p:notes xmlns:a="http://schemas.openxmlformats.org/drawingml/2006/main" xmlns:p="http://schemas.openxmlformats.org/presentationml/2006/main" xmlns:r="http://schemas.openxmlformats.org/officeDocument/2006/relationships">
+<p:notes xmlns:a="http://schemas.openxmlformats.org/drawingml/2006/main" xmlns:r="http://schemas.openxmlformats.org/officeDocument/2006/relationships" xmlns:p="http://schemas.openxmlformats.org/presentationml/2006/main">
   <p:cSld>
     <p:spTree>
       <p:nvGrpSpPr>
@@ -1710,7 +1728,7 @@
         <p:nvSpPr>
           <p:cNvPr id="2" name="Slide Image Placeholder 1"/>
           <p:cNvSpPr>
-            <a:spLocks noGrp="1"/>
+            <a:spLocks noGrp="1" noRot="1" noChangeAspect="1"/>
           </p:cNvSpPr>
           <p:nvPr>
             <p:ph type="sldImg" idx="2"/>
@@ -1725,7 +1743,7 @@
             <a:spLocks noGrp="1"/>
           </p:cNvSpPr>
           <p:nvPr>
-            <p:ph type="body" idx="3" sz="quarter"/>
+            <p:ph type="body" sz="quarter" idx="3"/>
           </p:nvPr>
         </p:nvSpPr>
         <p:spPr/>
@@ -1746,7 +1764,7 @@
             <a:spLocks noGrp="1"/>
           </p:cNvSpPr>
           <p:nvPr>
-            <p:ph type="sldNum" idx="5" sz="quarter"/>
+            <p:ph type="sldNum" sz="quarter" idx="5"/>
           </p:nvPr>
         </p:nvSpPr>
         <p:spPr/>
@@ -1760,7 +1778,7 @@
 </file>
 
 <file path=ppt/notesSlides/notesSlide26.xml><?xml version="1.0" encoding="utf-8"?>
-<p:notes xmlns:a="http://schemas.openxmlformats.org/drawingml/2006/main" xmlns:p="http://schemas.openxmlformats.org/presentationml/2006/main" xmlns:r="http://schemas.openxmlformats.org/officeDocument/2006/relationships">
+<p:notes xmlns:a="http://schemas.openxmlformats.org/drawingml/2006/main" xmlns:r="http://schemas.openxmlformats.org/officeDocument/2006/relationships" xmlns:p="http://schemas.openxmlformats.org/presentationml/2006/main">
   <p:cSld>
     <p:spTree>
       <p:nvGrpSpPr>
@@ -1780,7 +1798,7 @@
         <p:nvSpPr>
           <p:cNvPr id="2" name="Slide Image Placeholder 1"/>
           <p:cNvSpPr>
-            <a:spLocks noGrp="1"/>
+            <a:spLocks noGrp="1" noRot="1" noChangeAspect="1"/>
           </p:cNvSpPr>
           <p:nvPr>
             <p:ph type="sldImg" idx="2"/>
@@ -1795,7 +1813,7 @@
             <a:spLocks noGrp="1"/>
           </p:cNvSpPr>
           <p:nvPr>
-            <p:ph type="body" idx="3" sz="quarter"/>
+            <p:ph type="body" sz="quarter" idx="3"/>
           </p:nvPr>
         </p:nvSpPr>
         <p:spPr/>
@@ -1816,7 +1834,7 @@
             <a:spLocks noGrp="1"/>
           </p:cNvSpPr>
           <p:nvPr>
-            <p:ph type="sldNum" idx="5" sz="quarter"/>
+            <p:ph type="sldNum" sz="quarter" idx="5"/>
           </p:nvPr>
         </p:nvSpPr>
         <p:spPr/>
@@ -1830,7 +1848,7 @@
 </file>
 
 <file path=ppt/notesSlides/notesSlide27.xml><?xml version="1.0" encoding="utf-8"?>
-<p:notes xmlns:a="http://schemas.openxmlformats.org/drawingml/2006/main" xmlns:p="http://schemas.openxmlformats.org/presentationml/2006/main" xmlns:r="http://schemas.openxmlformats.org/officeDocument/2006/relationships">
+<p:notes xmlns:a="http://schemas.openxmlformats.org/drawingml/2006/main" xmlns:r="http://schemas.openxmlformats.org/officeDocument/2006/relationships" xmlns:p="http://schemas.openxmlformats.org/presentationml/2006/main">
   <p:cSld>
     <p:spTree>
       <p:nvGrpSpPr>
@@ -1850,7 +1868,7 @@
         <p:nvSpPr>
           <p:cNvPr id="2" name="Slide Image Placeholder 1"/>
           <p:cNvSpPr>
-            <a:spLocks noGrp="1"/>
+            <a:spLocks noGrp="1" noRot="1" noChangeAspect="1"/>
           </p:cNvSpPr>
           <p:nvPr>
             <p:ph type="sldImg" idx="2"/>
@@ -1865,7 +1883,7 @@
             <a:spLocks noGrp="1"/>
           </p:cNvSpPr>
           <p:nvPr>
-            <p:ph type="body" idx="3" sz="quarter"/>
+            <p:ph type="body" sz="quarter" idx="3"/>
           </p:nvPr>
         </p:nvSpPr>
         <p:spPr/>
@@ -1886,7 +1904,7 @@
             <a:spLocks noGrp="1"/>
           </p:cNvSpPr>
           <p:nvPr>
-            <p:ph type="sldNum" idx="5" sz="quarter"/>
+            <p:ph type="sldNum" sz="quarter" idx="5"/>
           </p:nvPr>
         </p:nvSpPr>
         <p:spPr/>
@@ -1900,7 +1918,7 @@
 </file>
 
 <file path=ppt/notesSlides/notesSlide28.xml><?xml version="1.0" encoding="utf-8"?>
-<p:notes xmlns:a="http://schemas.openxmlformats.org/drawingml/2006/main" xmlns:p="http://schemas.openxmlformats.org/presentationml/2006/main" xmlns:r="http://schemas.openxmlformats.org/officeDocument/2006/relationships">
+<p:notes xmlns:a="http://schemas.openxmlformats.org/drawingml/2006/main" xmlns:r="http://schemas.openxmlformats.org/officeDocument/2006/relationships" xmlns:p="http://schemas.openxmlformats.org/presentationml/2006/main">
   <p:cSld>
     <p:spTree>
       <p:nvGrpSpPr>
@@ -1920,7 +1938,7 @@
         <p:nvSpPr>
           <p:cNvPr id="2" name="Slide Image Placeholder 1"/>
           <p:cNvSpPr>
-            <a:spLocks noGrp="1"/>
+            <a:spLocks noGrp="1" noRot="1" noChangeAspect="1"/>
           </p:cNvSpPr>
           <p:nvPr>
             <p:ph type="sldImg" idx="2"/>
@@ -1935,7 +1953,7 @@
             <a:spLocks noGrp="1"/>
           </p:cNvSpPr>
           <p:nvPr>
-            <p:ph type="body" idx="3" sz="quarter"/>
+            <p:ph type="body" sz="quarter" idx="3"/>
           </p:nvPr>
         </p:nvSpPr>
         <p:spPr/>
@@ -1956,7 +1974,7 @@
             <a:spLocks noGrp="1"/>
           </p:cNvSpPr>
           <p:nvPr>
-            <p:ph type="sldNum" idx="5" sz="quarter"/>
+            <p:ph type="sldNum" sz="quarter" idx="5"/>
           </p:nvPr>
         </p:nvSpPr>
         <p:spPr/>
@@ -1970,7 +1988,7 @@
 </file>
 
 <file path=ppt/notesSlides/notesSlide29.xml><?xml version="1.0" encoding="utf-8"?>
-<p:notes xmlns:a="http://schemas.openxmlformats.org/drawingml/2006/main" xmlns:p="http://schemas.openxmlformats.org/presentationml/2006/main" xmlns:r="http://schemas.openxmlformats.org/officeDocument/2006/relationships">
+<p:notes xmlns:a="http://schemas.openxmlformats.org/drawingml/2006/main" xmlns:r="http://schemas.openxmlformats.org/officeDocument/2006/relationships" xmlns:p="http://schemas.openxmlformats.org/presentationml/2006/main">
   <p:cSld>
     <p:spTree>
       <p:nvGrpSpPr>
@@ -1990,7 +2008,7 @@
         <p:nvSpPr>
           <p:cNvPr id="2" name="Slide Image Placeholder 1"/>
           <p:cNvSpPr>
-            <a:spLocks noGrp="1"/>
+            <a:spLocks noGrp="1" noRot="1" noChangeAspect="1"/>
           </p:cNvSpPr>
           <p:nvPr>
             <p:ph type="sldImg" idx="2"/>
@@ -2005,7 +2023,7 @@
             <a:spLocks noGrp="1"/>
           </p:cNvSpPr>
           <p:nvPr>
-            <p:ph type="body" idx="3" sz="quarter"/>
+            <p:ph type="body" sz="quarter" idx="3"/>
           </p:nvPr>
         </p:nvSpPr>
         <p:spPr/>
@@ -2026,7 +2044,7 @@
             <a:spLocks noGrp="1"/>
           </p:cNvSpPr>
           <p:nvPr>
-            <p:ph type="sldNum" idx="5" sz="quarter"/>
+            <p:ph type="sldNum" sz="quarter" idx="5"/>
           </p:nvPr>
         </p:nvSpPr>
         <p:spPr/>
@@ -2040,7 +2058,7 @@
 </file>
 
 <file path=ppt/notesSlides/notesSlide3.xml><?xml version="1.0" encoding="utf-8"?>
-<p:notes xmlns:a="http://schemas.openxmlformats.org/drawingml/2006/main" xmlns:p="http://schemas.openxmlformats.org/presentationml/2006/main" xmlns:r="http://schemas.openxmlformats.org/officeDocument/2006/relationships">
+<p:notes xmlns:a="http://schemas.openxmlformats.org/drawingml/2006/main" xmlns:r="http://schemas.openxmlformats.org/officeDocument/2006/relationships" xmlns:p="http://schemas.openxmlformats.org/presentationml/2006/main">
   <p:cSld>
     <p:spTree>
       <p:nvGrpSpPr>
@@ -2060,7 +2078,7 @@
         <p:nvSpPr>
           <p:cNvPr id="2" name="Slide Image Placeholder 1"/>
           <p:cNvSpPr>
-            <a:spLocks noGrp="1"/>
+            <a:spLocks noGrp="1" noRot="1" noChangeAspect="1"/>
           </p:cNvSpPr>
           <p:nvPr>
             <p:ph type="sldImg" idx="2"/>
@@ -2075,7 +2093,7 @@
             <a:spLocks noGrp="1"/>
           </p:cNvSpPr>
           <p:nvPr>
-            <p:ph type="body" idx="3" sz="quarter"/>
+            <p:ph type="body" sz="quarter" idx="3"/>
           </p:nvPr>
         </p:nvSpPr>
         <p:spPr/>
@@ -2096,7 +2114,7 @@
             <a:spLocks noGrp="1"/>
           </p:cNvSpPr>
           <p:nvPr>
-            <p:ph type="sldNum" idx="5" sz="quarter"/>
+            <p:ph type="sldNum" sz="quarter" idx="5"/>
           </p:nvPr>
         </p:nvSpPr>
         <p:spPr/>
@@ -2110,7 +2128,7 @@
 </file>
 
 <file path=ppt/notesSlides/notesSlide30.xml><?xml version="1.0" encoding="utf-8"?>
-<p:notes xmlns:a="http://schemas.openxmlformats.org/drawingml/2006/main" xmlns:p="http://schemas.openxmlformats.org/presentationml/2006/main" xmlns:r="http://schemas.openxmlformats.org/officeDocument/2006/relationships">
+<p:notes xmlns:a="http://schemas.openxmlformats.org/drawingml/2006/main" xmlns:r="http://schemas.openxmlformats.org/officeDocument/2006/relationships" xmlns:p="http://schemas.openxmlformats.org/presentationml/2006/main">
   <p:cSld>
     <p:spTree>
       <p:nvGrpSpPr>
@@ -2130,7 +2148,7 @@
         <p:nvSpPr>
           <p:cNvPr id="2" name="Slide Image Placeholder 1"/>
           <p:cNvSpPr>
-            <a:spLocks noGrp="1"/>
+            <a:spLocks noGrp="1" noRot="1" noChangeAspect="1"/>
           </p:cNvSpPr>
           <p:nvPr>
             <p:ph type="sldImg" idx="2"/>
@@ -2145,7 +2163,7 @@
             <a:spLocks noGrp="1"/>
           </p:cNvSpPr>
           <p:nvPr>
-            <p:ph type="body" idx="3" sz="quarter"/>
+            <p:ph type="body" sz="quarter" idx="3"/>
           </p:nvPr>
         </p:nvSpPr>
         <p:spPr/>
@@ -2166,7 +2184,7 @@
             <a:spLocks noGrp="1"/>
           </p:cNvSpPr>
           <p:nvPr>
-            <p:ph type="sldNum" idx="5" sz="quarter"/>
+            <p:ph type="sldNum" sz="quarter" idx="5"/>
           </p:nvPr>
         </p:nvSpPr>
         <p:spPr/>
@@ -2180,7 +2198,7 @@
 </file>
 
 <file path=ppt/notesSlides/notesSlide31.xml><?xml version="1.0" encoding="utf-8"?>
-<p:notes xmlns:a="http://schemas.openxmlformats.org/drawingml/2006/main" xmlns:p="http://schemas.openxmlformats.org/presentationml/2006/main" xmlns:r="http://schemas.openxmlformats.org/officeDocument/2006/relationships">
+<p:notes xmlns:a="http://schemas.openxmlformats.org/drawingml/2006/main" xmlns:r="http://schemas.openxmlformats.org/officeDocument/2006/relationships" xmlns:p="http://schemas.openxmlformats.org/presentationml/2006/main">
   <p:cSld>
     <p:spTree>
       <p:nvGrpSpPr>
@@ -2200,7 +2218,7 @@
         <p:nvSpPr>
           <p:cNvPr id="2" name="Slide Image Placeholder 1"/>
           <p:cNvSpPr>
-            <a:spLocks noGrp="1"/>
+            <a:spLocks noGrp="1" noRot="1" noChangeAspect="1"/>
           </p:cNvSpPr>
           <p:nvPr>
             <p:ph type="sldImg" idx="2"/>
@@ -2215,7 +2233,7 @@
             <a:spLocks noGrp="1"/>
           </p:cNvSpPr>
           <p:nvPr>
-            <p:ph type="body" idx="3" sz="quarter"/>
+            <p:ph type="body" sz="quarter" idx="3"/>
           </p:nvPr>
         </p:nvSpPr>
         <p:spPr/>
@@ -2236,7 +2254,7 @@
             <a:spLocks noGrp="1"/>
           </p:cNvSpPr>
           <p:nvPr>
-            <p:ph type="sldNum" idx="5" sz="quarter"/>
+            <p:ph type="sldNum" sz="quarter" idx="5"/>
           </p:nvPr>
         </p:nvSpPr>
         <p:spPr/>
@@ -2250,7 +2268,7 @@
 </file>
 
 <file path=ppt/notesSlides/notesSlide32.xml><?xml version="1.0" encoding="utf-8"?>
-<p:notes xmlns:a="http://schemas.openxmlformats.org/drawingml/2006/main" xmlns:p="http://schemas.openxmlformats.org/presentationml/2006/main" xmlns:r="http://schemas.openxmlformats.org/officeDocument/2006/relationships">
+<p:notes xmlns:a="http://schemas.openxmlformats.org/drawingml/2006/main" xmlns:r="http://schemas.openxmlformats.org/officeDocument/2006/relationships" xmlns:p="http://schemas.openxmlformats.org/presentationml/2006/main">
   <p:cSld>
     <p:spTree>
       <p:nvGrpSpPr>
@@ -2270,7 +2288,7 @@
         <p:nvSpPr>
           <p:cNvPr id="2" name="Slide Image Placeholder 1"/>
           <p:cNvSpPr>
-            <a:spLocks noGrp="1"/>
+            <a:spLocks noGrp="1" noRot="1" noChangeAspect="1"/>
           </p:cNvSpPr>
           <p:nvPr>
             <p:ph type="sldImg" idx="2"/>
@@ -2285,7 +2303,7 @@
             <a:spLocks noGrp="1"/>
           </p:cNvSpPr>
           <p:nvPr>
-            <p:ph type="body" idx="3" sz="quarter"/>
+            <p:ph type="body" sz="quarter" idx="3"/>
           </p:nvPr>
         </p:nvSpPr>
         <p:spPr/>
@@ -2306,7 +2324,7 @@
             <a:spLocks noGrp="1"/>
           </p:cNvSpPr>
           <p:nvPr>
-            <p:ph type="sldNum" idx="5" sz="quarter"/>
+            <p:ph type="sldNum" sz="quarter" idx="5"/>
           </p:nvPr>
         </p:nvSpPr>
         <p:spPr/>
@@ -2320,7 +2338,7 @@
 </file>
 
 <file path=ppt/notesSlides/notesSlide33.xml><?xml version="1.0" encoding="utf-8"?>
-<p:notes xmlns:a="http://schemas.openxmlformats.org/drawingml/2006/main" xmlns:p="http://schemas.openxmlformats.org/presentationml/2006/main" xmlns:r="http://schemas.openxmlformats.org/officeDocument/2006/relationships">
+<p:notes xmlns:a="http://schemas.openxmlformats.org/drawingml/2006/main" xmlns:r="http://schemas.openxmlformats.org/officeDocument/2006/relationships" xmlns:p="http://schemas.openxmlformats.org/presentationml/2006/main">
   <p:cSld>
     <p:spTree>
       <p:nvGrpSpPr>
@@ -2340,7 +2358,7 @@
         <p:nvSpPr>
           <p:cNvPr id="2" name="Slide Image Placeholder 1"/>
           <p:cNvSpPr>
-            <a:spLocks noGrp="1"/>
+            <a:spLocks noGrp="1" noRot="1" noChangeAspect="1"/>
           </p:cNvSpPr>
           <p:nvPr>
             <p:ph type="sldImg" idx="2"/>
@@ -2355,7 +2373,7 @@
             <a:spLocks noGrp="1"/>
           </p:cNvSpPr>
           <p:nvPr>
-            <p:ph type="body" idx="3" sz="quarter"/>
+            <p:ph type="body" sz="quarter" idx="3"/>
           </p:nvPr>
         </p:nvSpPr>
         <p:spPr/>
@@ -2376,7 +2394,7 @@
             <a:spLocks noGrp="1"/>
           </p:cNvSpPr>
           <p:nvPr>
-            <p:ph type="sldNum" idx="5" sz="quarter"/>
+            <p:ph type="sldNum" sz="quarter" idx="5"/>
           </p:nvPr>
         </p:nvSpPr>
         <p:spPr/>
@@ -2390,7 +2408,7 @@
 </file>
 
 <file path=ppt/notesSlides/notesSlide4.xml><?xml version="1.0" encoding="utf-8"?>
-<p:notes xmlns:a="http://schemas.openxmlformats.org/drawingml/2006/main" xmlns:p="http://schemas.openxmlformats.org/presentationml/2006/main" xmlns:r="http://schemas.openxmlformats.org/officeDocument/2006/relationships">
+<p:notes xmlns:a="http://schemas.openxmlformats.org/drawingml/2006/main" xmlns:r="http://schemas.openxmlformats.org/officeDocument/2006/relationships" xmlns:p="http://schemas.openxmlformats.org/presentationml/2006/main">
   <p:cSld>
     <p:spTree>
       <p:nvGrpSpPr>
@@ -2410,7 +2428,7 @@
         <p:nvSpPr>
           <p:cNvPr id="2" name="Slide Image Placeholder 1"/>
           <p:cNvSpPr>
-            <a:spLocks noGrp="1"/>
+            <a:spLocks noGrp="1" noRot="1" noChangeAspect="1"/>
           </p:cNvSpPr>
           <p:nvPr>
             <p:ph type="sldImg" idx="2"/>
@@ -2425,7 +2443,7 @@
             <a:spLocks noGrp="1"/>
           </p:cNvSpPr>
           <p:nvPr>
-            <p:ph type="body" idx="3" sz="quarter"/>
+            <p:ph type="body" sz="quarter" idx="3"/>
           </p:nvPr>
         </p:nvSpPr>
         <p:spPr/>
@@ -2446,7 +2464,7 @@
             <a:spLocks noGrp="1"/>
           </p:cNvSpPr>
           <p:nvPr>
-            <p:ph type="sldNum" idx="5" sz="quarter"/>
+            <p:ph type="sldNum" sz="quarter" idx="5"/>
           </p:nvPr>
         </p:nvSpPr>
         <p:spPr/>
@@ -2460,7 +2478,7 @@
 </file>
 
 <file path=ppt/notesSlides/notesSlide5.xml><?xml version="1.0" encoding="utf-8"?>
-<p:notes xmlns:a="http://schemas.openxmlformats.org/drawingml/2006/main" xmlns:p="http://schemas.openxmlformats.org/presentationml/2006/main" xmlns:r="http://schemas.openxmlformats.org/officeDocument/2006/relationships">
+<p:notes xmlns:a="http://schemas.openxmlformats.org/drawingml/2006/main" xmlns:r="http://schemas.openxmlformats.org/officeDocument/2006/relationships" xmlns:p="http://schemas.openxmlformats.org/presentationml/2006/main">
   <p:cSld>
     <p:spTree>
       <p:nvGrpSpPr>
@@ -2480,7 +2498,7 @@
         <p:nvSpPr>
           <p:cNvPr id="2" name="Slide Image Placeholder 1"/>
           <p:cNvSpPr>
-            <a:spLocks noGrp="1"/>
+            <a:spLocks noGrp="1" noRot="1" noChangeAspect="1"/>
           </p:cNvSpPr>
           <p:nvPr>
             <p:ph type="sldImg" idx="2"/>
@@ -2495,7 +2513,7 @@
             <a:spLocks noGrp="1"/>
           </p:cNvSpPr>
           <p:nvPr>
-            <p:ph type="body" idx="3" sz="quarter"/>
+            <p:ph type="body" sz="quarter" idx="3"/>
           </p:nvPr>
         </p:nvSpPr>
         <p:spPr/>
@@ -2516,7 +2534,7 @@
             <a:spLocks noGrp="1"/>
           </p:cNvSpPr>
           <p:nvPr>
-            <p:ph type="sldNum" idx="5" sz="quarter"/>
+            <p:ph type="sldNum" sz="quarter" idx="5"/>
           </p:nvPr>
         </p:nvSpPr>
         <p:spPr/>
@@ -2530,7 +2548,7 @@
 </file>
 
 <file path=ppt/notesSlides/notesSlide6.xml><?xml version="1.0" encoding="utf-8"?>
-<p:notes xmlns:a="http://schemas.openxmlformats.org/drawingml/2006/main" xmlns:p="http://schemas.openxmlformats.org/presentationml/2006/main" xmlns:r="http://schemas.openxmlformats.org/officeDocument/2006/relationships">
+<p:notes xmlns:a="http://schemas.openxmlformats.org/drawingml/2006/main" xmlns:r="http://schemas.openxmlformats.org/officeDocument/2006/relationships" xmlns:p="http://schemas.openxmlformats.org/presentationml/2006/main">
   <p:cSld>
     <p:spTree>
       <p:nvGrpSpPr>
@@ -2550,7 +2568,7 @@
         <p:nvSpPr>
           <p:cNvPr id="2" name="Slide Image Placeholder 1"/>
           <p:cNvSpPr>
-            <a:spLocks noGrp="1"/>
+            <a:spLocks noGrp="1" noRot="1" noChangeAspect="1"/>
           </p:cNvSpPr>
           <p:nvPr>
             <p:ph type="sldImg" idx="2"/>
@@ -2565,7 +2583,7 @@
             <a:spLocks noGrp="1"/>
           </p:cNvSpPr>
           <p:nvPr>
-            <p:ph type="body" idx="3" sz="quarter"/>
+            <p:ph type="body" sz="quarter" idx="3"/>
           </p:nvPr>
         </p:nvSpPr>
         <p:spPr/>
@@ -2586,7 +2604,7 @@
             <a:spLocks noGrp="1"/>
           </p:cNvSpPr>
           <p:nvPr>
-            <p:ph type="sldNum" idx="5" sz="quarter"/>
+            <p:ph type="sldNum" sz="quarter" idx="5"/>
           </p:nvPr>
         </p:nvSpPr>
         <p:spPr/>
@@ -2600,7 +2618,7 @@
 </file>
 
 <file path=ppt/notesSlides/notesSlide7.xml><?xml version="1.0" encoding="utf-8"?>
-<p:notes xmlns:a="http://schemas.openxmlformats.org/drawingml/2006/main" xmlns:p="http://schemas.openxmlformats.org/presentationml/2006/main" xmlns:r="http://schemas.openxmlformats.org/officeDocument/2006/relationships">
+<p:notes xmlns:a="http://schemas.openxmlformats.org/drawingml/2006/main" xmlns:r="http://schemas.openxmlformats.org/officeDocument/2006/relationships" xmlns:p="http://schemas.openxmlformats.org/presentationml/2006/main">
   <p:cSld>
     <p:spTree>
       <p:nvGrpSpPr>
@@ -2620,7 +2638,7 @@
         <p:nvSpPr>
           <p:cNvPr id="2" name="Slide Image Placeholder 1"/>
           <p:cNvSpPr>
-            <a:spLocks noGrp="1"/>
+            <a:spLocks noGrp="1" noRot="1" noChangeAspect="1"/>
           </p:cNvSpPr>
           <p:nvPr>
             <p:ph type="sldImg" idx="2"/>
@@ -2635,7 +2653,7 @@
             <a:spLocks noGrp="1"/>
           </p:cNvSpPr>
           <p:nvPr>
-            <p:ph type="body" idx="3" sz="quarter"/>
+            <p:ph type="body" sz="quarter" idx="3"/>
           </p:nvPr>
         </p:nvSpPr>
         <p:spPr/>
@@ -2656,7 +2674,7 @@
             <a:spLocks noGrp="1"/>
           </p:cNvSpPr>
           <p:nvPr>
-            <p:ph type="sldNum" idx="5" sz="quarter"/>
+            <p:ph type="sldNum" sz="quarter" idx="5"/>
           </p:nvPr>
         </p:nvSpPr>
         <p:spPr/>
@@ -2670,7 +2688,7 @@
 </file>
 
 <file path=ppt/notesSlides/notesSlide8.xml><?xml version="1.0" encoding="utf-8"?>
-<p:notes xmlns:a="http://schemas.openxmlformats.org/drawingml/2006/main" xmlns:p="http://schemas.openxmlformats.org/presentationml/2006/main" xmlns:r="http://schemas.openxmlformats.org/officeDocument/2006/relationships">
+<p:notes xmlns:a="http://schemas.openxmlformats.org/drawingml/2006/main" xmlns:r="http://schemas.openxmlformats.org/officeDocument/2006/relationships" xmlns:p="http://schemas.openxmlformats.org/presentationml/2006/main">
   <p:cSld>
     <p:spTree>
       <p:nvGrpSpPr>
@@ -2690,7 +2708,7 @@
         <p:nvSpPr>
           <p:cNvPr id="2" name="Slide Image Placeholder 1"/>
           <p:cNvSpPr>
-            <a:spLocks noGrp="1"/>
+            <a:spLocks noGrp="1" noRot="1" noChangeAspect="1"/>
           </p:cNvSpPr>
           <p:nvPr>
             <p:ph type="sldImg" idx="2"/>
@@ -2705,7 +2723,7 @@
             <a:spLocks noGrp="1"/>
           </p:cNvSpPr>
           <p:nvPr>
-            <p:ph type="body" idx="3" sz="quarter"/>
+            <p:ph type="body" sz="quarter" idx="3"/>
           </p:nvPr>
         </p:nvSpPr>
         <p:spPr/>
@@ -2726,7 +2744,7 @@
             <a:spLocks noGrp="1"/>
           </p:cNvSpPr>
           <p:nvPr>
-            <p:ph type="sldNum" idx="5" sz="quarter"/>
+            <p:ph type="sldNum" sz="quarter" idx="5"/>
           </p:nvPr>
         </p:nvSpPr>
         <p:spPr/>
@@ -2740,7 +2758,7 @@
 </file>
 
 <file path=ppt/notesSlides/notesSlide9.xml><?xml version="1.0" encoding="utf-8"?>
-<p:notes xmlns:a="http://schemas.openxmlformats.org/drawingml/2006/main" xmlns:p="http://schemas.openxmlformats.org/presentationml/2006/main" xmlns:r="http://schemas.openxmlformats.org/officeDocument/2006/relationships">
+<p:notes xmlns:a="http://schemas.openxmlformats.org/drawingml/2006/main" xmlns:r="http://schemas.openxmlformats.org/officeDocument/2006/relationships" xmlns:p="http://schemas.openxmlformats.org/presentationml/2006/main">
   <p:cSld>
     <p:spTree>
       <p:nvGrpSpPr>
@@ -2760,7 +2778,7 @@
         <p:nvSpPr>
           <p:cNvPr id="2" name="Slide Image Placeholder 1"/>
           <p:cNvSpPr>
-            <a:spLocks noGrp="1"/>
+            <a:spLocks noGrp="1" noRot="1" noChangeAspect="1"/>
           </p:cNvSpPr>
           <p:nvPr>
             <p:ph type="sldImg" idx="2"/>
@@ -2775,7 +2793,7 @@
             <a:spLocks noGrp="1"/>
           </p:cNvSpPr>
           <p:nvPr>
-            <p:ph type="body" idx="3" sz="quarter"/>
+            <p:ph type="body" sz="quarter" idx="3"/>
           </p:nvPr>
         </p:nvSpPr>
         <p:spPr/>
@@ -2796,7 +2814,7 @@
             <a:spLocks noGrp="1"/>
           </p:cNvSpPr>
           <p:nvPr>
-            <p:ph type="sldNum" idx="5" sz="quarter"/>
+            <p:ph type="sldNum" sz="quarter" idx="5"/>
           </p:nvPr>
         </p:nvSpPr>
         <p:spPr/>
@@ -2847,10 +2865,9 @@
           <a:lstStyle/>
           <a:p>
             <a:r>
-              <a:rPr lang="en-US" smtClean="0"/>
+              <a:rPr lang="en-US"/>
               <a:t>Click to edit Master title style</a:t>
             </a:r>
-            <a:endParaRPr lang="en-US"/>
           </a:p>
         </p:txBody>
       </p:sp>
@@ -2966,10 +2983,9 @@
           </a:lstStyle>
           <a:p>
             <a:r>
-              <a:rPr lang="en-US" smtClean="0"/>
+              <a:rPr lang="en-US"/>
               <a:t>Click to edit Master subtitle style</a:t>
             </a:r>
-            <a:endParaRPr lang="en-US"/>
           </a:p>
         </p:txBody>
       </p:sp>
@@ -2990,7 +3006,7 @@
           <a:p>
             <a:fld id="{5BCAD085-E8A6-8845-BD4E-CB4CCA059FC4}" type="datetimeFigureOut">
               <a:rPr lang="en-US" smtClean="0"/>
-              <a:t>1/27/13</a:t>
+              <a:t>10/29/2026</a:t>
             </a:fld>
             <a:endParaRPr lang="en-US"/>
           </a:p>
@@ -3084,10 +3100,9 @@
           <a:lstStyle/>
           <a:p>
             <a:r>
-              <a:rPr lang="en-US" smtClean="0"/>
+              <a:rPr lang="en-US"/>
               <a:t>Click to edit Master title style</a:t>
             </a:r>
-            <a:endParaRPr lang="en-US"/>
           </a:p>
         </p:txBody>
       </p:sp>
@@ -3108,38 +3123,37 @@
           <a:p>
             <a:pPr lvl="0"/>
             <a:r>
-              <a:rPr lang="en-US" smtClean="0"/>
+              <a:rPr lang="en-US"/>
               <a:t>Click to edit Master text styles</a:t>
             </a:r>
           </a:p>
           <a:p>
             <a:pPr lvl="1"/>
             <a:r>
-              <a:rPr lang="en-US" smtClean="0"/>
+              <a:rPr lang="en-US"/>
               <a:t>Second level</a:t>
             </a:r>
           </a:p>
           <a:p>
             <a:pPr lvl="2"/>
             <a:r>
-              <a:rPr lang="en-US" smtClean="0"/>
+              <a:rPr lang="en-US"/>
               <a:t>Third level</a:t>
             </a:r>
           </a:p>
           <a:p>
             <a:pPr lvl="3"/>
             <a:r>
-              <a:rPr lang="en-US" smtClean="0"/>
+              <a:rPr lang="en-US"/>
               <a:t>Fourth level</a:t>
             </a:r>
           </a:p>
           <a:p>
             <a:pPr lvl="4"/>
             <a:r>
-              <a:rPr lang="en-US" smtClean="0"/>
+              <a:rPr lang="en-US"/>
               <a:t>Fifth level</a:t>
             </a:r>
-            <a:endParaRPr lang="en-US"/>
           </a:p>
         </p:txBody>
       </p:sp>
@@ -3160,7 +3174,7 @@
           <a:p>
             <a:fld id="{5BCAD085-E8A6-8845-BD4E-CB4CCA059FC4}" type="datetimeFigureOut">
               <a:rPr lang="en-US" smtClean="0"/>
-              <a:t>1/27/13</a:t>
+              <a:t>10/29/2026</a:t>
             </a:fld>
             <a:endParaRPr lang="en-US"/>
           </a:p>
@@ -3259,10 +3273,9 @@
           <a:lstStyle/>
           <a:p>
             <a:r>
-              <a:rPr lang="en-US" smtClean="0"/>
+              <a:rPr lang="en-US"/>
               <a:t>Click to edit Master title style</a:t>
             </a:r>
-            <a:endParaRPr lang="en-US"/>
           </a:p>
         </p:txBody>
       </p:sp>
@@ -3288,38 +3301,37 @@
           <a:p>
             <a:pPr lvl="0"/>
             <a:r>
-              <a:rPr lang="en-US" smtClean="0"/>
+              <a:rPr lang="en-US"/>
               <a:t>Click to edit Master text styles</a:t>
             </a:r>
           </a:p>
           <a:p>
             <a:pPr lvl="1"/>
             <a:r>
-              <a:rPr lang="en-US" smtClean="0"/>
+              <a:rPr lang="en-US"/>
               <a:t>Second level</a:t>
             </a:r>
           </a:p>
           <a:p>
             <a:pPr lvl="2"/>
             <a:r>
-              <a:rPr lang="en-US" smtClean="0"/>
+              <a:rPr lang="en-US"/>
               <a:t>Third level</a:t>
             </a:r>
           </a:p>
           <a:p>
             <a:pPr lvl="3"/>
             <a:r>
-              <a:rPr lang="en-US" smtClean="0"/>
+              <a:rPr lang="en-US"/>
               <a:t>Fourth level</a:t>
             </a:r>
           </a:p>
           <a:p>
             <a:pPr lvl="4"/>
             <a:r>
-              <a:rPr lang="en-US" smtClean="0"/>
+              <a:rPr lang="en-US"/>
               <a:t>Fifth level</a:t>
             </a:r>
-            <a:endParaRPr lang="en-US"/>
           </a:p>
         </p:txBody>
       </p:sp>
@@ -3340,7 +3352,7 @@
           <a:p>
             <a:fld id="{5BCAD085-E8A6-8845-BD4E-CB4CCA059FC4}" type="datetimeFigureOut">
               <a:rPr lang="en-US" smtClean="0"/>
-              <a:t>1/27/13</a:t>
+              <a:t>10/29/2026</a:t>
             </a:fld>
             <a:endParaRPr lang="en-US"/>
           </a:p>
@@ -3434,10 +3446,9 @@
           <a:lstStyle/>
           <a:p>
             <a:r>
-              <a:rPr lang="en-US" smtClean="0"/>
+              <a:rPr lang="en-US"/>
               <a:t>Click to edit Master title style</a:t>
             </a:r>
-            <a:endParaRPr lang="en-US"/>
           </a:p>
         </p:txBody>
       </p:sp>
@@ -3458,38 +3469,37 @@
           <a:p>
             <a:pPr lvl="0"/>
             <a:r>
-              <a:rPr lang="en-US" smtClean="0"/>
+              <a:rPr lang="en-US"/>
               <a:t>Click to edit Master text styles</a:t>
             </a:r>
           </a:p>
           <a:p>
             <a:pPr lvl="1"/>
             <a:r>
-              <a:rPr lang="en-US" smtClean="0"/>
+              <a:rPr lang="en-US"/>
               <a:t>Second level</a:t>
             </a:r>
           </a:p>
           <a:p>
             <a:pPr lvl="2"/>
             <a:r>
-              <a:rPr lang="en-US" smtClean="0"/>
+              <a:rPr lang="en-US"/>
               <a:t>Third level</a:t>
             </a:r>
           </a:p>
           <a:p>
             <a:pPr lvl="3"/>
             <a:r>
-              <a:rPr lang="en-US" smtClean="0"/>
+              <a:rPr lang="en-US"/>
               <a:t>Fourth level</a:t>
             </a:r>
           </a:p>
           <a:p>
             <a:pPr lvl="4"/>
             <a:r>
-              <a:rPr lang="en-US" smtClean="0"/>
+              <a:rPr lang="en-US"/>
               <a:t>Fifth level</a:t>
             </a:r>
-            <a:endParaRPr lang="en-US"/>
           </a:p>
         </p:txBody>
       </p:sp>
@@ -3510,7 +3520,7 @@
           <a:p>
             <a:fld id="{5BCAD085-E8A6-8845-BD4E-CB4CCA059FC4}" type="datetimeFigureOut">
               <a:rPr lang="en-US" smtClean="0"/>
-              <a:t>1/27/13</a:t>
+              <a:t>10/29/2026</a:t>
             </a:fld>
             <a:endParaRPr lang="en-US"/>
           </a:p>
@@ -3613,10 +3623,9 @@
           </a:lstStyle>
           <a:p>
             <a:r>
-              <a:rPr lang="en-US" smtClean="0"/>
+              <a:rPr lang="en-US"/>
               <a:t>Click to edit Master title style</a:t>
             </a:r>
-            <a:endParaRPr lang="en-US"/>
           </a:p>
         </p:txBody>
       </p:sp>
@@ -3733,7 +3742,7 @@
           <a:p>
             <a:pPr lvl="0"/>
             <a:r>
-              <a:rPr lang="en-US" smtClean="0"/>
+              <a:rPr lang="en-US"/>
               <a:t>Click to edit Master text styles</a:t>
             </a:r>
           </a:p>
@@ -3756,7 +3765,7 @@
           <a:p>
             <a:fld id="{5BCAD085-E8A6-8845-BD4E-CB4CCA059FC4}" type="datetimeFigureOut">
               <a:rPr lang="en-US" smtClean="0"/>
-              <a:t>1/27/13</a:t>
+              <a:t>10/29/2026</a:t>
             </a:fld>
             <a:endParaRPr lang="en-US"/>
           </a:p>
@@ -3850,10 +3859,9 @@
           <a:lstStyle/>
           <a:p>
             <a:r>
-              <a:rPr lang="en-US" smtClean="0"/>
+              <a:rPr lang="en-US"/>
               <a:t>Click to edit Master title style</a:t>
             </a:r>
-            <a:endParaRPr lang="en-US"/>
           </a:p>
         </p:txBody>
       </p:sp>
@@ -3907,38 +3915,37 @@
           <a:p>
             <a:pPr lvl="0"/>
             <a:r>
-              <a:rPr lang="en-US" smtClean="0"/>
+              <a:rPr lang="en-US"/>
               <a:t>Click to edit Master text styles</a:t>
             </a:r>
           </a:p>
           <a:p>
             <a:pPr lvl="1"/>
             <a:r>
-              <a:rPr lang="en-US" smtClean="0"/>
+              <a:rPr lang="en-US"/>
               <a:t>Second level</a:t>
             </a:r>
           </a:p>
           <a:p>
             <a:pPr lvl="2"/>
             <a:r>
-              <a:rPr lang="en-US" smtClean="0"/>
+              <a:rPr lang="en-US"/>
               <a:t>Third level</a:t>
             </a:r>
           </a:p>
           <a:p>
             <a:pPr lvl="3"/>
             <a:r>
-              <a:rPr lang="en-US" smtClean="0"/>
+              <a:rPr lang="en-US"/>
               <a:t>Fourth level</a:t>
             </a:r>
           </a:p>
           <a:p>
             <a:pPr lvl="4"/>
             <a:r>
-              <a:rPr lang="en-US" smtClean="0"/>
+              <a:rPr lang="en-US"/>
               <a:t>Fifth level</a:t>
             </a:r>
-            <a:endParaRPr lang="en-US"/>
           </a:p>
         </p:txBody>
       </p:sp>
@@ -3992,38 +3999,37 @@
           <a:p>
             <a:pPr lvl="0"/>
             <a:r>
-              <a:rPr lang="en-US" smtClean="0"/>
+              <a:rPr lang="en-US"/>
               <a:t>Click to edit Master text styles</a:t>
             </a:r>
           </a:p>
           <a:p>
             <a:pPr lvl="1"/>
             <a:r>
-              <a:rPr lang="en-US" smtClean="0"/>
+              <a:rPr lang="en-US"/>
               <a:t>Second level</a:t>
             </a:r>
           </a:p>
           <a:p>
             <a:pPr lvl="2"/>
             <a:r>
-              <a:rPr lang="en-US" smtClean="0"/>
+              <a:rPr lang="en-US"/>
               <a:t>Third level</a:t>
             </a:r>
           </a:p>
           <a:p>
             <a:pPr lvl="3"/>
             <a:r>
-              <a:rPr lang="en-US" smtClean="0"/>
+              <a:rPr lang="en-US"/>
               <a:t>Fourth level</a:t>
             </a:r>
           </a:p>
           <a:p>
             <a:pPr lvl="4"/>
             <a:r>
-              <a:rPr lang="en-US" smtClean="0"/>
+              <a:rPr lang="en-US"/>
               <a:t>Fifth level</a:t>
             </a:r>
-            <a:endParaRPr lang="en-US"/>
           </a:p>
         </p:txBody>
       </p:sp>
@@ -4044,7 +4050,7 @@
           <a:p>
             <a:fld id="{5BCAD085-E8A6-8845-BD4E-CB4CCA059FC4}" type="datetimeFigureOut">
               <a:rPr lang="en-US" smtClean="0"/>
-              <a:t>1/27/13</a:t>
+              <a:t>10/29/2026</a:t>
             </a:fld>
             <a:endParaRPr lang="en-US"/>
           </a:p>
@@ -4142,10 +4148,9 @@
           </a:lstStyle>
           <a:p>
             <a:r>
-              <a:rPr lang="en-US" smtClean="0"/>
+              <a:rPr lang="en-US"/>
               <a:t>Click to edit Master title style</a:t>
             </a:r>
-            <a:endParaRPr lang="en-US"/>
           </a:p>
         </p:txBody>
       </p:sp>
@@ -4208,7 +4213,7 @@
           <a:p>
             <a:pPr lvl="0"/>
             <a:r>
-              <a:rPr lang="en-US" smtClean="0"/>
+              <a:rPr lang="en-US"/>
               <a:t>Click to edit Master text styles</a:t>
             </a:r>
           </a:p>
@@ -4264,38 +4269,37 @@
           <a:p>
             <a:pPr lvl="0"/>
             <a:r>
-              <a:rPr lang="en-US" smtClean="0"/>
+              <a:rPr lang="en-US"/>
               <a:t>Click to edit Master text styles</a:t>
             </a:r>
           </a:p>
           <a:p>
             <a:pPr lvl="1"/>
             <a:r>
-              <a:rPr lang="en-US" smtClean="0"/>
+              <a:rPr lang="en-US"/>
               <a:t>Second level</a:t>
             </a:r>
           </a:p>
           <a:p>
             <a:pPr lvl="2"/>
             <a:r>
-              <a:rPr lang="en-US" smtClean="0"/>
+              <a:rPr lang="en-US"/>
               <a:t>Third level</a:t>
             </a:r>
           </a:p>
           <a:p>
             <a:pPr lvl="3"/>
             <a:r>
-              <a:rPr lang="en-US" smtClean="0"/>
+              <a:rPr lang="en-US"/>
               <a:t>Fourth level</a:t>
             </a:r>
           </a:p>
           <a:p>
             <a:pPr lvl="4"/>
             <a:r>
-              <a:rPr lang="en-US" smtClean="0"/>
+              <a:rPr lang="en-US"/>
               <a:t>Fifth level</a:t>
             </a:r>
-            <a:endParaRPr lang="en-US"/>
           </a:p>
         </p:txBody>
       </p:sp>
@@ -4358,7 +4362,7 @@
           <a:p>
             <a:pPr lvl="0"/>
             <a:r>
-              <a:rPr lang="en-US" smtClean="0"/>
+              <a:rPr lang="en-US"/>
               <a:t>Click to edit Master text styles</a:t>
             </a:r>
           </a:p>
@@ -4414,38 +4418,37 @@
           <a:p>
             <a:pPr lvl="0"/>
             <a:r>
-              <a:rPr lang="en-US" smtClean="0"/>
+              <a:rPr lang="en-US"/>
               <a:t>Click to edit Master text styles</a:t>
             </a:r>
           </a:p>
           <a:p>
             <a:pPr lvl="1"/>
             <a:r>
-              <a:rPr lang="en-US" smtClean="0"/>
+              <a:rPr lang="en-US"/>
               <a:t>Second level</a:t>
             </a:r>
           </a:p>
           <a:p>
             <a:pPr lvl="2"/>
             <a:r>
-              <a:rPr lang="en-US" smtClean="0"/>
+              <a:rPr lang="en-US"/>
               <a:t>Third level</a:t>
             </a:r>
           </a:p>
           <a:p>
             <a:pPr lvl="3"/>
             <a:r>
-              <a:rPr lang="en-US" smtClean="0"/>
+              <a:rPr lang="en-US"/>
               <a:t>Fourth level</a:t>
             </a:r>
           </a:p>
           <a:p>
             <a:pPr lvl="4"/>
             <a:r>
-              <a:rPr lang="en-US" smtClean="0"/>
+              <a:rPr lang="en-US"/>
               <a:t>Fifth level</a:t>
             </a:r>
-            <a:endParaRPr lang="en-US"/>
           </a:p>
         </p:txBody>
       </p:sp>
@@ -4466,7 +4469,7 @@
           <a:p>
             <a:fld id="{5BCAD085-E8A6-8845-BD4E-CB4CCA059FC4}" type="datetimeFigureOut">
               <a:rPr lang="en-US" smtClean="0"/>
-              <a:t>1/27/13</a:t>
+              <a:t>10/29/2026</a:t>
             </a:fld>
             <a:endParaRPr lang="en-US"/>
           </a:p>
@@ -4560,10 +4563,9 @@
           <a:lstStyle/>
           <a:p>
             <a:r>
-              <a:rPr lang="en-US" smtClean="0"/>
+              <a:rPr lang="en-US"/>
               <a:t>Click to edit Master title style</a:t>
             </a:r>
-            <a:endParaRPr lang="en-US"/>
           </a:p>
         </p:txBody>
       </p:sp>
@@ -4584,7 +4586,7 @@
           <a:p>
             <a:fld id="{5BCAD085-E8A6-8845-BD4E-CB4CCA059FC4}" type="datetimeFigureOut">
               <a:rPr lang="en-US" smtClean="0"/>
-              <a:t>1/27/13</a:t>
+              <a:t>10/29/2026</a:t>
             </a:fld>
             <a:endParaRPr lang="en-US"/>
           </a:p>
@@ -4679,7 +4681,7 @@
           <a:p>
             <a:fld id="{5BCAD085-E8A6-8845-BD4E-CB4CCA059FC4}" type="datetimeFigureOut">
               <a:rPr lang="en-US" smtClean="0"/>
-              <a:t>1/27/13</a:t>
+              <a:t>10/29/2026</a:t>
             </a:fld>
             <a:endParaRPr lang="en-US"/>
           </a:p>
@@ -4782,10 +4784,9 @@
           </a:lstStyle>
           <a:p>
             <a:r>
-              <a:rPr lang="en-US" smtClean="0"/>
+              <a:rPr lang="en-US"/>
               <a:t>Click to edit Master title style</a:t>
             </a:r>
-            <a:endParaRPr lang="en-US"/>
           </a:p>
         </p:txBody>
       </p:sp>
@@ -4839,38 +4840,37 @@
           <a:p>
             <a:pPr lvl="0"/>
             <a:r>
-              <a:rPr lang="en-US" smtClean="0"/>
+              <a:rPr lang="en-US"/>
               <a:t>Click to edit Master text styles</a:t>
             </a:r>
           </a:p>
           <a:p>
             <a:pPr lvl="1"/>
             <a:r>
-              <a:rPr lang="en-US" smtClean="0"/>
+              <a:rPr lang="en-US"/>
               <a:t>Second level</a:t>
             </a:r>
           </a:p>
           <a:p>
             <a:pPr lvl="2"/>
             <a:r>
-              <a:rPr lang="en-US" smtClean="0"/>
+              <a:rPr lang="en-US"/>
               <a:t>Third level</a:t>
             </a:r>
           </a:p>
           <a:p>
             <a:pPr lvl="3"/>
             <a:r>
-              <a:rPr lang="en-US" smtClean="0"/>
+              <a:rPr lang="en-US"/>
               <a:t>Fourth level</a:t>
             </a:r>
           </a:p>
           <a:p>
             <a:pPr lvl="4"/>
             <a:r>
-              <a:rPr lang="en-US" smtClean="0"/>
+              <a:rPr lang="en-US"/>
               <a:t>Fifth level</a:t>
             </a:r>
-            <a:endParaRPr lang="en-US"/>
           </a:p>
         </p:txBody>
       </p:sp>
@@ -4933,7 +4933,7 @@
           <a:p>
             <a:pPr lvl="0"/>
             <a:r>
-              <a:rPr lang="en-US" smtClean="0"/>
+              <a:rPr lang="en-US"/>
               <a:t>Click to edit Master text styles</a:t>
             </a:r>
           </a:p>
@@ -4956,7 +4956,7 @@
           <a:p>
             <a:fld id="{5BCAD085-E8A6-8845-BD4E-CB4CCA059FC4}" type="datetimeFigureOut">
               <a:rPr lang="en-US" smtClean="0"/>
-              <a:t>1/27/13</a:t>
+              <a:t>10/29/2026</a:t>
             </a:fld>
             <a:endParaRPr lang="en-US"/>
           </a:p>
@@ -5059,10 +5059,9 @@
           </a:lstStyle>
           <a:p>
             <a:r>
-              <a:rPr lang="en-US" smtClean="0"/>
+              <a:rPr lang="en-US"/>
               <a:t>Click to edit Master title style</a:t>
             </a:r>
-            <a:endParaRPr lang="en-US"/>
           </a:p>
         </p:txBody>
       </p:sp>
@@ -5186,7 +5185,7 @@
           <a:p>
             <a:pPr lvl="0"/>
             <a:r>
-              <a:rPr lang="en-US" smtClean="0"/>
+              <a:rPr lang="en-US"/>
               <a:t>Click to edit Master text styles</a:t>
             </a:r>
           </a:p>
@@ -5209,7 +5208,7 @@
           <a:p>
             <a:fld id="{5BCAD085-E8A6-8845-BD4E-CB4CCA059FC4}" type="datetimeFigureOut">
               <a:rPr lang="en-US" smtClean="0"/>
-              <a:t>1/27/13</a:t>
+              <a:t>10/29/2026</a:t>
             </a:fld>
             <a:endParaRPr lang="en-US"/>
           </a:p>
@@ -5318,10 +5317,9 @@
           <a:lstStyle/>
           <a:p>
             <a:r>
-              <a:rPr lang="en-US" smtClean="0"/>
+              <a:rPr lang="en-US"/>
               <a:t>Click to edit Master title style</a:t>
             </a:r>
-            <a:endParaRPr lang="en-US"/>
           </a:p>
         </p:txBody>
       </p:sp>
@@ -5352,38 +5350,37 @@
           <a:p>
             <a:pPr lvl="0"/>
             <a:r>
-              <a:rPr lang="en-US" smtClean="0"/>
+              <a:rPr lang="en-US"/>
               <a:t>Click to edit Master text styles</a:t>
             </a:r>
           </a:p>
           <a:p>
             <a:pPr lvl="1"/>
             <a:r>
-              <a:rPr lang="en-US" smtClean="0"/>
+              <a:rPr lang="en-US"/>
               <a:t>Second level</a:t>
             </a:r>
           </a:p>
           <a:p>
             <a:pPr lvl="2"/>
             <a:r>
-              <a:rPr lang="en-US" smtClean="0"/>
+              <a:rPr lang="en-US"/>
               <a:t>Third level</a:t>
             </a:r>
           </a:p>
           <a:p>
             <a:pPr lvl="3"/>
             <a:r>
-              <a:rPr lang="en-US" smtClean="0"/>
+              <a:rPr lang="en-US"/>
               <a:t>Fourth level</a:t>
             </a:r>
           </a:p>
           <a:p>
             <a:pPr lvl="4"/>
             <a:r>
-              <a:rPr lang="en-US" smtClean="0"/>
+              <a:rPr lang="en-US"/>
               <a:t>Fifth level</a:t>
             </a:r>
-            <a:endParaRPr lang="en-US"/>
           </a:p>
         </p:txBody>
       </p:sp>
@@ -5422,7 +5419,7 @@
           <a:p>
             <a:fld id="{5BCAD085-E8A6-8845-BD4E-CB4CCA059FC4}" type="datetimeFigureOut">
               <a:rPr lang="en-US" smtClean="0"/>
-              <a:t>1/27/13</a:t>
+              <a:t>10/29/2026</a:t>
             </a:fld>
             <a:endParaRPr lang="en-US"/>
           </a:p>
@@ -5781,7 +5778,7 @@
 </file>
 
 <file path=ppt/slides/slide1.xml><?xml version="1.0" encoding="utf-8"?>
-<p:sld xmlns:a="http://schemas.openxmlformats.org/drawingml/2006/main" xmlns:p="http://schemas.openxmlformats.org/presentationml/2006/main" xmlns:r="http://schemas.openxmlformats.org/officeDocument/2006/relationships">
+<p:sld xmlns:a="http://schemas.openxmlformats.org/drawingml/2006/main" xmlns:r="http://schemas.openxmlformats.org/officeDocument/2006/relationships" xmlns:p="http://schemas.openxmlformats.org/presentationml/2006/main">
   <p:cSld>
     <p:spTree>
       <p:nvGrpSpPr>
@@ -5789,7 +5786,14 @@
         <p:cNvGrpSpPr/>
         <p:nvPr/>
       </p:nvGrpSpPr>
-      <p:grpSpPr/>
+      <p:grpSpPr>
+        <a:xfrm>
+          <a:off x="0" y="0"/>
+          <a:ext cx="0" cy="0"/>
+          <a:chOff x="0" y="0"/>
+          <a:chExt cx="0" cy="0"/>
+        </a:xfrm>
+      </p:grpSpPr>
       <p:sp>
         <p:nvSpPr>
           <p:cNvPr id="2" name="Rectangle 1"/>
@@ -5831,6 +5835,7 @@
           <a:lstStyle/>
           <a:p>
             <a:pPr algn="ctr"/>
+            <a:endParaRPr/>
           </a:p>
         </p:txBody>
       </p:sp>
@@ -5875,6 +5880,7 @@
           <a:lstStyle/>
           <a:p>
             <a:pPr algn="ctr"/>
+            <a:endParaRPr/>
           </a:p>
         </p:txBody>
       </p:sp>
@@ -5919,6 +5925,7 @@
           <a:lstStyle/>
           <a:p>
             <a:pPr algn="ctr"/>
+            <a:endParaRPr/>
           </a:p>
         </p:txBody>
       </p:sp>
@@ -5970,7 +5977,7 @@
         <p:spPr>
           <a:xfrm>
             <a:off x="731520" y="2377440"/>
-            <a:ext cx="10698480" cy="1554480"/>
+            <a:ext cx="10698480" cy="615553"/>
           </a:xfrm>
           <a:prstGeom prst="rect">
             <a:avLst/>
@@ -5989,14 +5996,20 @@
               </a:spcAft>
             </a:pPr>
             <a:r>
-              <a:rPr sz="3400" b="1">
+              <a:rPr lang="en-US" sz="3400" b="1" dirty="0">
                 <a:solidFill>
                   <a:srgbClr val="C0392B"/>
                 </a:solidFill>
                 <a:latin typeface="맑은 고딕"/>
               </a:rPr>
-              <a:t>RAC</a:t>
-            </a:r>
+              <a:t>CRSCTL/SVRCTL</a:t>
+            </a:r>
+            <a:endParaRPr sz="3400" b="1" dirty="0">
+              <a:solidFill>
+                <a:srgbClr val="C0392B"/>
+              </a:solidFill>
+              <a:latin typeface="맑은 고딕"/>
+            </a:endParaRPr>
           </a:p>
         </p:txBody>
       </p:sp>
@@ -6087,7 +6100,7 @@
 </file>
 
 <file path=ppt/slides/slide10.xml><?xml version="1.0" encoding="utf-8"?>
-<p:sld xmlns:a="http://schemas.openxmlformats.org/drawingml/2006/main" xmlns:p="http://schemas.openxmlformats.org/presentationml/2006/main" xmlns:r="http://schemas.openxmlformats.org/officeDocument/2006/relationships">
+<p:sld xmlns:a="http://schemas.openxmlformats.org/drawingml/2006/main" xmlns:r="http://schemas.openxmlformats.org/officeDocument/2006/relationships" xmlns:p="http://schemas.openxmlformats.org/presentationml/2006/main">
   <p:cSld>
     <p:spTree>
       <p:nvGrpSpPr>
@@ -6095,7 +6108,14 @@
         <p:cNvGrpSpPr/>
         <p:nvPr/>
       </p:nvGrpSpPr>
-      <p:grpSpPr/>
+      <p:grpSpPr>
+        <a:xfrm>
+          <a:off x="0" y="0"/>
+          <a:ext cx="0" cy="0"/>
+          <a:chOff x="0" y="0"/>
+          <a:chExt cx="0" cy="0"/>
+        </a:xfrm>
+      </p:grpSpPr>
       <p:sp>
         <p:nvSpPr>
           <p:cNvPr id="2" name="Rectangle 1"/>
@@ -6137,6 +6157,7 @@
           <a:lstStyle/>
           <a:p>
             <a:pPr algn="ctr"/>
+            <a:endParaRPr/>
           </a:p>
         </p:txBody>
       </p:sp>
@@ -6330,7 +6351,7 @@
 </file>
 
 <file path=ppt/slides/slide11.xml><?xml version="1.0" encoding="utf-8"?>
-<p:sld xmlns:a="http://schemas.openxmlformats.org/drawingml/2006/main" xmlns:p="http://schemas.openxmlformats.org/presentationml/2006/main" xmlns:r="http://schemas.openxmlformats.org/officeDocument/2006/relationships">
+<p:sld xmlns:a="http://schemas.openxmlformats.org/drawingml/2006/main" xmlns:r="http://schemas.openxmlformats.org/officeDocument/2006/relationships" xmlns:p="http://schemas.openxmlformats.org/presentationml/2006/main">
   <p:cSld>
     <p:spTree>
       <p:nvGrpSpPr>
@@ -6338,7 +6359,14 @@
         <p:cNvGrpSpPr/>
         <p:nvPr/>
       </p:nvGrpSpPr>
-      <p:grpSpPr/>
+      <p:grpSpPr>
+        <a:xfrm>
+          <a:off x="0" y="0"/>
+          <a:ext cx="0" cy="0"/>
+          <a:chOff x="0" y="0"/>
+          <a:chExt cx="0" cy="0"/>
+        </a:xfrm>
+      </p:grpSpPr>
       <p:sp>
         <p:nvSpPr>
           <p:cNvPr id="2" name="Rectangle 1"/>
@@ -6380,6 +6408,7 @@
           <a:lstStyle/>
           <a:p>
             <a:pPr algn="ctr"/>
+            <a:endParaRPr/>
           </a:p>
         </p:txBody>
       </p:sp>
@@ -6573,7 +6602,7 @@
 </file>
 
 <file path=ppt/slides/slide12.xml><?xml version="1.0" encoding="utf-8"?>
-<p:sld xmlns:a="http://schemas.openxmlformats.org/drawingml/2006/main" xmlns:p="http://schemas.openxmlformats.org/presentationml/2006/main" xmlns:r="http://schemas.openxmlformats.org/officeDocument/2006/relationships">
+<p:sld xmlns:a="http://schemas.openxmlformats.org/drawingml/2006/main" xmlns:r="http://schemas.openxmlformats.org/officeDocument/2006/relationships" xmlns:p="http://schemas.openxmlformats.org/presentationml/2006/main">
   <p:cSld>
     <p:spTree>
       <p:nvGrpSpPr>
@@ -6581,7 +6610,14 @@
         <p:cNvGrpSpPr/>
         <p:nvPr/>
       </p:nvGrpSpPr>
-      <p:grpSpPr/>
+      <p:grpSpPr>
+        <a:xfrm>
+          <a:off x="0" y="0"/>
+          <a:ext cx="0" cy="0"/>
+          <a:chOff x="0" y="0"/>
+          <a:chExt cx="0" cy="0"/>
+        </a:xfrm>
+      </p:grpSpPr>
       <p:sp>
         <p:nvSpPr>
           <p:cNvPr id="2" name="Rectangle 1"/>
@@ -6623,6 +6659,7 @@
           <a:lstStyle/>
           <a:p>
             <a:pPr algn="ctr"/>
+            <a:endParaRPr/>
           </a:p>
         </p:txBody>
       </p:sp>
@@ -6816,7 +6853,7 @@
 </file>
 
 <file path=ppt/slides/slide13.xml><?xml version="1.0" encoding="utf-8"?>
-<p:sld xmlns:a="http://schemas.openxmlformats.org/drawingml/2006/main" xmlns:p="http://schemas.openxmlformats.org/presentationml/2006/main" xmlns:r="http://schemas.openxmlformats.org/officeDocument/2006/relationships">
+<p:sld xmlns:a="http://schemas.openxmlformats.org/drawingml/2006/main" xmlns:r="http://schemas.openxmlformats.org/officeDocument/2006/relationships" xmlns:p="http://schemas.openxmlformats.org/presentationml/2006/main">
   <p:cSld>
     <p:spTree>
       <p:nvGrpSpPr>
@@ -6824,7 +6861,14 @@
         <p:cNvGrpSpPr/>
         <p:nvPr/>
       </p:nvGrpSpPr>
-      <p:grpSpPr/>
+      <p:grpSpPr>
+        <a:xfrm>
+          <a:off x="0" y="0"/>
+          <a:ext cx="0" cy="0"/>
+          <a:chOff x="0" y="0"/>
+          <a:chExt cx="0" cy="0"/>
+        </a:xfrm>
+      </p:grpSpPr>
       <p:sp>
         <p:nvSpPr>
           <p:cNvPr id="2" name="Rectangle 1"/>
@@ -6866,6 +6910,7 @@
           <a:lstStyle/>
           <a:p>
             <a:pPr algn="ctr"/>
+            <a:endParaRPr/>
           </a:p>
         </p:txBody>
       </p:sp>
@@ -7059,7 +7104,7 @@
 </file>
 
 <file path=ppt/slides/slide14.xml><?xml version="1.0" encoding="utf-8"?>
-<p:sld xmlns:a="http://schemas.openxmlformats.org/drawingml/2006/main" xmlns:p="http://schemas.openxmlformats.org/presentationml/2006/main" xmlns:r="http://schemas.openxmlformats.org/officeDocument/2006/relationships">
+<p:sld xmlns:a="http://schemas.openxmlformats.org/drawingml/2006/main" xmlns:r="http://schemas.openxmlformats.org/officeDocument/2006/relationships" xmlns:p="http://schemas.openxmlformats.org/presentationml/2006/main">
   <p:cSld>
     <p:spTree>
       <p:nvGrpSpPr>
@@ -7067,7 +7112,14 @@
         <p:cNvGrpSpPr/>
         <p:nvPr/>
       </p:nvGrpSpPr>
-      <p:grpSpPr/>
+      <p:grpSpPr>
+        <a:xfrm>
+          <a:off x="0" y="0"/>
+          <a:ext cx="0" cy="0"/>
+          <a:chOff x="0" y="0"/>
+          <a:chExt cx="0" cy="0"/>
+        </a:xfrm>
+      </p:grpSpPr>
       <p:sp>
         <p:nvSpPr>
           <p:cNvPr id="2" name="Rectangle 1"/>
@@ -7109,6 +7161,7 @@
           <a:lstStyle/>
           <a:p>
             <a:pPr algn="ctr"/>
+            <a:endParaRPr/>
           </a:p>
         </p:txBody>
       </p:sp>
@@ -7231,6 +7284,7 @@
           <a:lstStyle/>
           <a:p>
             <a:pPr algn="ctr"/>
+            <a:endParaRPr/>
           </a:p>
         </p:txBody>
       </p:sp>
@@ -7298,7 +7352,7 @@
 </file>
 
 <file path=ppt/slides/slide15.xml><?xml version="1.0" encoding="utf-8"?>
-<p:sld xmlns:a="http://schemas.openxmlformats.org/drawingml/2006/main" xmlns:p="http://schemas.openxmlformats.org/presentationml/2006/main" xmlns:r="http://schemas.openxmlformats.org/officeDocument/2006/relationships">
+<p:sld xmlns:a="http://schemas.openxmlformats.org/drawingml/2006/main" xmlns:r="http://schemas.openxmlformats.org/officeDocument/2006/relationships" xmlns:p="http://schemas.openxmlformats.org/presentationml/2006/main">
   <p:cSld>
     <p:spTree>
       <p:nvGrpSpPr>
@@ -7306,7 +7360,14 @@
         <p:cNvGrpSpPr/>
         <p:nvPr/>
       </p:nvGrpSpPr>
-      <p:grpSpPr/>
+      <p:grpSpPr>
+        <a:xfrm>
+          <a:off x="0" y="0"/>
+          <a:ext cx="0" cy="0"/>
+          <a:chOff x="0" y="0"/>
+          <a:chExt cx="0" cy="0"/>
+        </a:xfrm>
+      </p:grpSpPr>
       <p:sp>
         <p:nvSpPr>
           <p:cNvPr id="2" name="Rectangle 1"/>
@@ -7348,6 +7409,7 @@
           <a:lstStyle/>
           <a:p>
             <a:pPr algn="ctr"/>
+            <a:endParaRPr/>
           </a:p>
         </p:txBody>
       </p:sp>
@@ -7541,7 +7603,7 @@
 </file>
 
 <file path=ppt/slides/slide16.xml><?xml version="1.0" encoding="utf-8"?>
-<p:sld xmlns:a="http://schemas.openxmlformats.org/drawingml/2006/main" xmlns:p="http://schemas.openxmlformats.org/presentationml/2006/main" xmlns:r="http://schemas.openxmlformats.org/officeDocument/2006/relationships">
+<p:sld xmlns:a="http://schemas.openxmlformats.org/drawingml/2006/main" xmlns:r="http://schemas.openxmlformats.org/officeDocument/2006/relationships" xmlns:p="http://schemas.openxmlformats.org/presentationml/2006/main">
   <p:cSld>
     <p:spTree>
       <p:nvGrpSpPr>
@@ -7549,7 +7611,14 @@
         <p:cNvGrpSpPr/>
         <p:nvPr/>
       </p:nvGrpSpPr>
-      <p:grpSpPr/>
+      <p:grpSpPr>
+        <a:xfrm>
+          <a:off x="0" y="0"/>
+          <a:ext cx="0" cy="0"/>
+          <a:chOff x="0" y="0"/>
+          <a:chExt cx="0" cy="0"/>
+        </a:xfrm>
+      </p:grpSpPr>
       <p:sp>
         <p:nvSpPr>
           <p:cNvPr id="2" name="Rectangle 1"/>
@@ -7591,6 +7660,7 @@
           <a:lstStyle/>
           <a:p>
             <a:pPr algn="ctr"/>
+            <a:endParaRPr/>
           </a:p>
         </p:txBody>
       </p:sp>
@@ -7784,7 +7854,7 @@
 </file>
 
 <file path=ppt/slides/slide17.xml><?xml version="1.0" encoding="utf-8"?>
-<p:sld xmlns:a="http://schemas.openxmlformats.org/drawingml/2006/main" xmlns:p="http://schemas.openxmlformats.org/presentationml/2006/main" xmlns:r="http://schemas.openxmlformats.org/officeDocument/2006/relationships">
+<p:sld xmlns:a="http://schemas.openxmlformats.org/drawingml/2006/main" xmlns:r="http://schemas.openxmlformats.org/officeDocument/2006/relationships" xmlns:p="http://schemas.openxmlformats.org/presentationml/2006/main">
   <p:cSld>
     <p:spTree>
       <p:nvGrpSpPr>
@@ -7792,7 +7862,14 @@
         <p:cNvGrpSpPr/>
         <p:nvPr/>
       </p:nvGrpSpPr>
-      <p:grpSpPr/>
+      <p:grpSpPr>
+        <a:xfrm>
+          <a:off x="0" y="0"/>
+          <a:ext cx="0" cy="0"/>
+          <a:chOff x="0" y="0"/>
+          <a:chExt cx="0" cy="0"/>
+        </a:xfrm>
+      </p:grpSpPr>
       <p:sp>
         <p:nvSpPr>
           <p:cNvPr id="2" name="Rectangle 1"/>
@@ -7834,6 +7911,7 @@
           <a:lstStyle/>
           <a:p>
             <a:pPr algn="ctr"/>
+            <a:endParaRPr/>
           </a:p>
         </p:txBody>
       </p:sp>
@@ -8027,7 +8105,7 @@
 </file>
 
 <file path=ppt/slides/slide18.xml><?xml version="1.0" encoding="utf-8"?>
-<p:sld xmlns:a="http://schemas.openxmlformats.org/drawingml/2006/main" xmlns:p="http://schemas.openxmlformats.org/presentationml/2006/main" xmlns:r="http://schemas.openxmlformats.org/officeDocument/2006/relationships">
+<p:sld xmlns:a="http://schemas.openxmlformats.org/drawingml/2006/main" xmlns:r="http://schemas.openxmlformats.org/officeDocument/2006/relationships" xmlns:p="http://schemas.openxmlformats.org/presentationml/2006/main">
   <p:cSld>
     <p:spTree>
       <p:nvGrpSpPr>
@@ -8035,7 +8113,14 @@
         <p:cNvGrpSpPr/>
         <p:nvPr/>
       </p:nvGrpSpPr>
-      <p:grpSpPr/>
+      <p:grpSpPr>
+        <a:xfrm>
+          <a:off x="0" y="0"/>
+          <a:ext cx="0" cy="0"/>
+          <a:chOff x="0" y="0"/>
+          <a:chExt cx="0" cy="0"/>
+        </a:xfrm>
+      </p:grpSpPr>
       <p:sp>
         <p:nvSpPr>
           <p:cNvPr id="2" name="Rectangle 1"/>
@@ -8077,6 +8162,7 @@
           <a:lstStyle/>
           <a:p>
             <a:pPr algn="ctr"/>
+            <a:endParaRPr/>
           </a:p>
         </p:txBody>
       </p:sp>
@@ -8270,7 +8356,7 @@
 </file>
 
 <file path=ppt/slides/slide19.xml><?xml version="1.0" encoding="utf-8"?>
-<p:sld xmlns:a="http://schemas.openxmlformats.org/drawingml/2006/main" xmlns:p="http://schemas.openxmlformats.org/presentationml/2006/main" xmlns:r="http://schemas.openxmlformats.org/officeDocument/2006/relationships">
+<p:sld xmlns:a="http://schemas.openxmlformats.org/drawingml/2006/main" xmlns:r="http://schemas.openxmlformats.org/officeDocument/2006/relationships" xmlns:p="http://schemas.openxmlformats.org/presentationml/2006/main">
   <p:cSld>
     <p:spTree>
       <p:nvGrpSpPr>
@@ -8278,7 +8364,14 @@
         <p:cNvGrpSpPr/>
         <p:nvPr/>
       </p:nvGrpSpPr>
-      <p:grpSpPr/>
+      <p:grpSpPr>
+        <a:xfrm>
+          <a:off x="0" y="0"/>
+          <a:ext cx="0" cy="0"/>
+          <a:chOff x="0" y="0"/>
+          <a:chExt cx="0" cy="0"/>
+        </a:xfrm>
+      </p:grpSpPr>
       <p:sp>
         <p:nvSpPr>
           <p:cNvPr id="2" name="Rectangle 1"/>
@@ -8320,6 +8413,7 @@
           <a:lstStyle/>
           <a:p>
             <a:pPr algn="ctr"/>
+            <a:endParaRPr/>
           </a:p>
         </p:txBody>
       </p:sp>
@@ -8513,7 +8607,7 @@
 </file>
 
 <file path=ppt/slides/slide2.xml><?xml version="1.0" encoding="utf-8"?>
-<p:sld xmlns:a="http://schemas.openxmlformats.org/drawingml/2006/main" xmlns:p="http://schemas.openxmlformats.org/presentationml/2006/main" xmlns:r="http://schemas.openxmlformats.org/officeDocument/2006/relationships">
+<p:sld xmlns:a="http://schemas.openxmlformats.org/drawingml/2006/main" xmlns:r="http://schemas.openxmlformats.org/officeDocument/2006/relationships" xmlns:p="http://schemas.openxmlformats.org/presentationml/2006/main">
   <p:cSld>
     <p:spTree>
       <p:nvGrpSpPr>
@@ -8521,7 +8615,14 @@
         <p:cNvGrpSpPr/>
         <p:nvPr/>
       </p:nvGrpSpPr>
-      <p:grpSpPr/>
+      <p:grpSpPr>
+        <a:xfrm>
+          <a:off x="0" y="0"/>
+          <a:ext cx="0" cy="0"/>
+          <a:chOff x="0" y="0"/>
+          <a:chExt cx="0" cy="0"/>
+        </a:xfrm>
+      </p:grpSpPr>
       <p:sp>
         <p:nvSpPr>
           <p:cNvPr id="2" name="Rectangle 1"/>
@@ -8563,6 +8664,7 @@
           <a:lstStyle/>
           <a:p>
             <a:pPr algn="ctr"/>
+            <a:endParaRPr/>
           </a:p>
         </p:txBody>
       </p:sp>
@@ -8733,7 +8835,7 @@
 </file>
 
 <file path=ppt/slides/slide20.xml><?xml version="1.0" encoding="utf-8"?>
-<p:sld xmlns:a="http://schemas.openxmlformats.org/drawingml/2006/main" xmlns:p="http://schemas.openxmlformats.org/presentationml/2006/main" xmlns:r="http://schemas.openxmlformats.org/officeDocument/2006/relationships">
+<p:sld xmlns:a="http://schemas.openxmlformats.org/drawingml/2006/main" xmlns:r="http://schemas.openxmlformats.org/officeDocument/2006/relationships" xmlns:p="http://schemas.openxmlformats.org/presentationml/2006/main">
   <p:cSld>
     <p:spTree>
       <p:nvGrpSpPr>
@@ -8741,7 +8843,14 @@
         <p:cNvGrpSpPr/>
         <p:nvPr/>
       </p:nvGrpSpPr>
-      <p:grpSpPr/>
+      <p:grpSpPr>
+        <a:xfrm>
+          <a:off x="0" y="0"/>
+          <a:ext cx="0" cy="0"/>
+          <a:chOff x="0" y="0"/>
+          <a:chExt cx="0" cy="0"/>
+        </a:xfrm>
+      </p:grpSpPr>
       <p:sp>
         <p:nvSpPr>
           <p:cNvPr id="2" name="Rectangle 1"/>
@@ -8783,6 +8892,7 @@
           <a:lstStyle/>
           <a:p>
             <a:pPr algn="ctr"/>
+            <a:endParaRPr/>
           </a:p>
         </p:txBody>
       </p:sp>
@@ -8976,7 +9086,7 @@
 </file>
 
 <file path=ppt/slides/slide21.xml><?xml version="1.0" encoding="utf-8"?>
-<p:sld xmlns:a="http://schemas.openxmlformats.org/drawingml/2006/main" xmlns:p="http://schemas.openxmlformats.org/presentationml/2006/main" xmlns:r="http://schemas.openxmlformats.org/officeDocument/2006/relationships">
+<p:sld xmlns:a="http://schemas.openxmlformats.org/drawingml/2006/main" xmlns:r="http://schemas.openxmlformats.org/officeDocument/2006/relationships" xmlns:p="http://schemas.openxmlformats.org/presentationml/2006/main">
   <p:cSld>
     <p:spTree>
       <p:nvGrpSpPr>
@@ -8984,7 +9094,14 @@
         <p:cNvGrpSpPr/>
         <p:nvPr/>
       </p:nvGrpSpPr>
-      <p:grpSpPr/>
+      <p:grpSpPr>
+        <a:xfrm>
+          <a:off x="0" y="0"/>
+          <a:ext cx="0" cy="0"/>
+          <a:chOff x="0" y="0"/>
+          <a:chExt cx="0" cy="0"/>
+        </a:xfrm>
+      </p:grpSpPr>
       <p:sp>
         <p:nvSpPr>
           <p:cNvPr id="2" name="Rectangle 1"/>
@@ -9026,6 +9143,7 @@
           <a:lstStyle/>
           <a:p>
             <a:pPr algn="ctr"/>
+            <a:endParaRPr/>
           </a:p>
         </p:txBody>
       </p:sp>
@@ -9148,6 +9266,7 @@
           <a:lstStyle/>
           <a:p>
             <a:pPr algn="ctr"/>
+            <a:endParaRPr/>
           </a:p>
         </p:txBody>
       </p:sp>
@@ -9215,7 +9334,7 @@
 </file>
 
 <file path=ppt/slides/slide22.xml><?xml version="1.0" encoding="utf-8"?>
-<p:sld xmlns:a="http://schemas.openxmlformats.org/drawingml/2006/main" xmlns:p="http://schemas.openxmlformats.org/presentationml/2006/main" xmlns:r="http://schemas.openxmlformats.org/officeDocument/2006/relationships">
+<p:sld xmlns:a="http://schemas.openxmlformats.org/drawingml/2006/main" xmlns:r="http://schemas.openxmlformats.org/officeDocument/2006/relationships" xmlns:p="http://schemas.openxmlformats.org/presentationml/2006/main">
   <p:cSld>
     <p:spTree>
       <p:nvGrpSpPr>
@@ -9223,7 +9342,14 @@
         <p:cNvGrpSpPr/>
         <p:nvPr/>
       </p:nvGrpSpPr>
-      <p:grpSpPr/>
+      <p:grpSpPr>
+        <a:xfrm>
+          <a:off x="0" y="0"/>
+          <a:ext cx="0" cy="0"/>
+          <a:chOff x="0" y="0"/>
+          <a:chExt cx="0" cy="0"/>
+        </a:xfrm>
+      </p:grpSpPr>
       <p:sp>
         <p:nvSpPr>
           <p:cNvPr id="2" name="Rectangle 1"/>
@@ -9265,6 +9391,7 @@
           <a:lstStyle/>
           <a:p>
             <a:pPr algn="ctr"/>
+            <a:endParaRPr/>
           </a:p>
         </p:txBody>
       </p:sp>
@@ -9458,7 +9585,7 @@
 </file>
 
 <file path=ppt/slides/slide23.xml><?xml version="1.0" encoding="utf-8"?>
-<p:sld xmlns:a="http://schemas.openxmlformats.org/drawingml/2006/main" xmlns:p="http://schemas.openxmlformats.org/presentationml/2006/main" xmlns:r="http://schemas.openxmlformats.org/officeDocument/2006/relationships">
+<p:sld xmlns:a="http://schemas.openxmlformats.org/drawingml/2006/main" xmlns:r="http://schemas.openxmlformats.org/officeDocument/2006/relationships" xmlns:p="http://schemas.openxmlformats.org/presentationml/2006/main">
   <p:cSld>
     <p:spTree>
       <p:nvGrpSpPr>
@@ -9466,7 +9593,14 @@
         <p:cNvGrpSpPr/>
         <p:nvPr/>
       </p:nvGrpSpPr>
-      <p:grpSpPr/>
+      <p:grpSpPr>
+        <a:xfrm>
+          <a:off x="0" y="0"/>
+          <a:ext cx="0" cy="0"/>
+          <a:chOff x="0" y="0"/>
+          <a:chExt cx="0" cy="0"/>
+        </a:xfrm>
+      </p:grpSpPr>
       <p:sp>
         <p:nvSpPr>
           <p:cNvPr id="2" name="Rectangle 1"/>
@@ -9508,6 +9642,7 @@
           <a:lstStyle/>
           <a:p>
             <a:pPr algn="ctr"/>
+            <a:endParaRPr/>
           </a:p>
         </p:txBody>
       </p:sp>
@@ -9701,7 +9836,7 @@
 </file>
 
 <file path=ppt/slides/slide24.xml><?xml version="1.0" encoding="utf-8"?>
-<p:sld xmlns:a="http://schemas.openxmlformats.org/drawingml/2006/main" xmlns:p="http://schemas.openxmlformats.org/presentationml/2006/main" xmlns:r="http://schemas.openxmlformats.org/officeDocument/2006/relationships">
+<p:sld xmlns:a="http://schemas.openxmlformats.org/drawingml/2006/main" xmlns:r="http://schemas.openxmlformats.org/officeDocument/2006/relationships" xmlns:p="http://schemas.openxmlformats.org/presentationml/2006/main">
   <p:cSld>
     <p:spTree>
       <p:nvGrpSpPr>
@@ -9709,7 +9844,14 @@
         <p:cNvGrpSpPr/>
         <p:nvPr/>
       </p:nvGrpSpPr>
-      <p:grpSpPr/>
+      <p:grpSpPr>
+        <a:xfrm>
+          <a:off x="0" y="0"/>
+          <a:ext cx="0" cy="0"/>
+          <a:chOff x="0" y="0"/>
+          <a:chExt cx="0" cy="0"/>
+        </a:xfrm>
+      </p:grpSpPr>
       <p:sp>
         <p:nvSpPr>
           <p:cNvPr id="2" name="Rectangle 1"/>
@@ -9751,6 +9893,7 @@
           <a:lstStyle/>
           <a:p>
             <a:pPr algn="ctr"/>
+            <a:endParaRPr/>
           </a:p>
         </p:txBody>
       </p:sp>
@@ -9944,7 +10087,7 @@
 </file>
 
 <file path=ppt/slides/slide25.xml><?xml version="1.0" encoding="utf-8"?>
-<p:sld xmlns:a="http://schemas.openxmlformats.org/drawingml/2006/main" xmlns:p="http://schemas.openxmlformats.org/presentationml/2006/main" xmlns:r="http://schemas.openxmlformats.org/officeDocument/2006/relationships">
+<p:sld xmlns:a="http://schemas.openxmlformats.org/drawingml/2006/main" xmlns:r="http://schemas.openxmlformats.org/officeDocument/2006/relationships" xmlns:p="http://schemas.openxmlformats.org/presentationml/2006/main">
   <p:cSld>
     <p:spTree>
       <p:nvGrpSpPr>
@@ -9952,7 +10095,14 @@
         <p:cNvGrpSpPr/>
         <p:nvPr/>
       </p:nvGrpSpPr>
-      <p:grpSpPr/>
+      <p:grpSpPr>
+        <a:xfrm>
+          <a:off x="0" y="0"/>
+          <a:ext cx="0" cy="0"/>
+          <a:chOff x="0" y="0"/>
+          <a:chExt cx="0" cy="0"/>
+        </a:xfrm>
+      </p:grpSpPr>
       <p:sp>
         <p:nvSpPr>
           <p:cNvPr id="2" name="Rectangle 1"/>
@@ -9994,6 +10144,7 @@
           <a:lstStyle/>
           <a:p>
             <a:pPr algn="ctr"/>
+            <a:endParaRPr/>
           </a:p>
         </p:txBody>
       </p:sp>
@@ -10187,7 +10338,7 @@
 </file>
 
 <file path=ppt/slides/slide26.xml><?xml version="1.0" encoding="utf-8"?>
-<p:sld xmlns:a="http://schemas.openxmlformats.org/drawingml/2006/main" xmlns:p="http://schemas.openxmlformats.org/presentationml/2006/main" xmlns:r="http://schemas.openxmlformats.org/officeDocument/2006/relationships">
+<p:sld xmlns:a="http://schemas.openxmlformats.org/drawingml/2006/main" xmlns:r="http://schemas.openxmlformats.org/officeDocument/2006/relationships" xmlns:p="http://schemas.openxmlformats.org/presentationml/2006/main">
   <p:cSld>
     <p:spTree>
       <p:nvGrpSpPr>
@@ -10195,7 +10346,14 @@
         <p:cNvGrpSpPr/>
         <p:nvPr/>
       </p:nvGrpSpPr>
-      <p:grpSpPr/>
+      <p:grpSpPr>
+        <a:xfrm>
+          <a:off x="0" y="0"/>
+          <a:ext cx="0" cy="0"/>
+          <a:chOff x="0" y="0"/>
+          <a:chExt cx="0" cy="0"/>
+        </a:xfrm>
+      </p:grpSpPr>
       <p:sp>
         <p:nvSpPr>
           <p:cNvPr id="2" name="Rectangle 1"/>
@@ -10237,6 +10395,7 @@
           <a:lstStyle/>
           <a:p>
             <a:pPr algn="ctr"/>
+            <a:endParaRPr/>
           </a:p>
         </p:txBody>
       </p:sp>
@@ -10430,7 +10589,7 @@
 </file>
 
 <file path=ppt/slides/slide27.xml><?xml version="1.0" encoding="utf-8"?>
-<p:sld xmlns:a="http://schemas.openxmlformats.org/drawingml/2006/main" xmlns:p="http://schemas.openxmlformats.org/presentationml/2006/main" xmlns:r="http://schemas.openxmlformats.org/officeDocument/2006/relationships">
+<p:sld xmlns:a="http://schemas.openxmlformats.org/drawingml/2006/main" xmlns:r="http://schemas.openxmlformats.org/officeDocument/2006/relationships" xmlns:p="http://schemas.openxmlformats.org/presentationml/2006/main">
   <p:cSld>
     <p:spTree>
       <p:nvGrpSpPr>
@@ -10438,7 +10597,14 @@
         <p:cNvGrpSpPr/>
         <p:nvPr/>
       </p:nvGrpSpPr>
-      <p:grpSpPr/>
+      <p:grpSpPr>
+        <a:xfrm>
+          <a:off x="0" y="0"/>
+          <a:ext cx="0" cy="0"/>
+          <a:chOff x="0" y="0"/>
+          <a:chExt cx="0" cy="0"/>
+        </a:xfrm>
+      </p:grpSpPr>
       <p:sp>
         <p:nvSpPr>
           <p:cNvPr id="2" name="Rectangle 1"/>
@@ -10480,6 +10646,7 @@
           <a:lstStyle/>
           <a:p>
             <a:pPr algn="ctr"/>
+            <a:endParaRPr/>
           </a:p>
         </p:txBody>
       </p:sp>
@@ -10602,6 +10769,7 @@
           <a:lstStyle/>
           <a:p>
             <a:pPr algn="ctr"/>
+            <a:endParaRPr/>
           </a:p>
         </p:txBody>
       </p:sp>
@@ -10669,7 +10837,7 @@
 </file>
 
 <file path=ppt/slides/slide28.xml><?xml version="1.0" encoding="utf-8"?>
-<p:sld xmlns:a="http://schemas.openxmlformats.org/drawingml/2006/main" xmlns:p="http://schemas.openxmlformats.org/presentationml/2006/main" xmlns:r="http://schemas.openxmlformats.org/officeDocument/2006/relationships">
+<p:sld xmlns:a="http://schemas.openxmlformats.org/drawingml/2006/main" xmlns:r="http://schemas.openxmlformats.org/officeDocument/2006/relationships" xmlns:p="http://schemas.openxmlformats.org/presentationml/2006/main">
   <p:cSld>
     <p:spTree>
       <p:nvGrpSpPr>
@@ -10677,7 +10845,14 @@
         <p:cNvGrpSpPr/>
         <p:nvPr/>
       </p:nvGrpSpPr>
-      <p:grpSpPr/>
+      <p:grpSpPr>
+        <a:xfrm>
+          <a:off x="0" y="0"/>
+          <a:ext cx="0" cy="0"/>
+          <a:chOff x="0" y="0"/>
+          <a:chExt cx="0" cy="0"/>
+        </a:xfrm>
+      </p:grpSpPr>
       <p:sp>
         <p:nvSpPr>
           <p:cNvPr id="2" name="Rectangle 1"/>
@@ -10719,6 +10894,7 @@
           <a:lstStyle/>
           <a:p>
             <a:pPr algn="ctr"/>
+            <a:endParaRPr/>
           </a:p>
         </p:txBody>
       </p:sp>
@@ -10912,7 +11088,7 @@
 </file>
 
 <file path=ppt/slides/slide29.xml><?xml version="1.0" encoding="utf-8"?>
-<p:sld xmlns:a="http://schemas.openxmlformats.org/drawingml/2006/main" xmlns:p="http://schemas.openxmlformats.org/presentationml/2006/main" xmlns:r="http://schemas.openxmlformats.org/officeDocument/2006/relationships">
+<p:sld xmlns:a="http://schemas.openxmlformats.org/drawingml/2006/main" xmlns:r="http://schemas.openxmlformats.org/officeDocument/2006/relationships" xmlns:p="http://schemas.openxmlformats.org/presentationml/2006/main">
   <p:cSld>
     <p:spTree>
       <p:nvGrpSpPr>
@@ -10920,7 +11096,14 @@
         <p:cNvGrpSpPr/>
         <p:nvPr/>
       </p:nvGrpSpPr>
-      <p:grpSpPr/>
+      <p:grpSpPr>
+        <a:xfrm>
+          <a:off x="0" y="0"/>
+          <a:ext cx="0" cy="0"/>
+          <a:chOff x="0" y="0"/>
+          <a:chExt cx="0" cy="0"/>
+        </a:xfrm>
+      </p:grpSpPr>
       <p:sp>
         <p:nvSpPr>
           <p:cNvPr id="2" name="Rectangle 1"/>
@@ -10962,6 +11145,7 @@
           <a:lstStyle/>
           <a:p>
             <a:pPr algn="ctr"/>
+            <a:endParaRPr/>
           </a:p>
         </p:txBody>
       </p:sp>
@@ -11155,7 +11339,7 @@
 </file>
 
 <file path=ppt/slides/slide3.xml><?xml version="1.0" encoding="utf-8"?>
-<p:sld xmlns:a="http://schemas.openxmlformats.org/drawingml/2006/main" xmlns:p="http://schemas.openxmlformats.org/presentationml/2006/main" xmlns:r="http://schemas.openxmlformats.org/officeDocument/2006/relationships">
+<p:sld xmlns:a="http://schemas.openxmlformats.org/drawingml/2006/main" xmlns:r="http://schemas.openxmlformats.org/officeDocument/2006/relationships" xmlns:p="http://schemas.openxmlformats.org/presentationml/2006/main">
   <p:cSld>
     <p:spTree>
       <p:nvGrpSpPr>
@@ -11163,7 +11347,14 @@
         <p:cNvGrpSpPr/>
         <p:nvPr/>
       </p:nvGrpSpPr>
-      <p:grpSpPr/>
+      <p:grpSpPr>
+        <a:xfrm>
+          <a:off x="0" y="0"/>
+          <a:ext cx="0" cy="0"/>
+          <a:chOff x="0" y="0"/>
+          <a:chExt cx="0" cy="0"/>
+        </a:xfrm>
+      </p:grpSpPr>
       <p:sp>
         <p:nvSpPr>
           <p:cNvPr id="2" name="Rectangle 1"/>
@@ -11205,6 +11396,7 @@
           <a:lstStyle/>
           <a:p>
             <a:pPr algn="ctr"/>
+            <a:endParaRPr/>
           </a:p>
         </p:txBody>
       </p:sp>
@@ -11391,7 +11583,7 @@
 </file>
 
 <file path=ppt/slides/slide30.xml><?xml version="1.0" encoding="utf-8"?>
-<p:sld xmlns:a="http://schemas.openxmlformats.org/drawingml/2006/main" xmlns:p="http://schemas.openxmlformats.org/presentationml/2006/main" xmlns:r="http://schemas.openxmlformats.org/officeDocument/2006/relationships">
+<p:sld xmlns:a="http://schemas.openxmlformats.org/drawingml/2006/main" xmlns:r="http://schemas.openxmlformats.org/officeDocument/2006/relationships" xmlns:p="http://schemas.openxmlformats.org/presentationml/2006/main">
   <p:cSld>
     <p:spTree>
       <p:nvGrpSpPr>
@@ -11399,7 +11591,14 @@
         <p:cNvGrpSpPr/>
         <p:nvPr/>
       </p:nvGrpSpPr>
-      <p:grpSpPr/>
+      <p:grpSpPr>
+        <a:xfrm>
+          <a:off x="0" y="0"/>
+          <a:ext cx="0" cy="0"/>
+          <a:chOff x="0" y="0"/>
+          <a:chExt cx="0" cy="0"/>
+        </a:xfrm>
+      </p:grpSpPr>
       <p:sp>
         <p:nvSpPr>
           <p:cNvPr id="2" name="Rectangle 1"/>
@@ -11441,6 +11640,7 @@
           <a:lstStyle/>
           <a:p>
             <a:pPr algn="ctr"/>
+            <a:endParaRPr/>
           </a:p>
         </p:txBody>
       </p:sp>
@@ -11634,7 +11834,7 @@
 </file>
 
 <file path=ppt/slides/slide31.xml><?xml version="1.0" encoding="utf-8"?>
-<p:sld xmlns:a="http://schemas.openxmlformats.org/drawingml/2006/main" xmlns:p="http://schemas.openxmlformats.org/presentationml/2006/main" xmlns:r="http://schemas.openxmlformats.org/officeDocument/2006/relationships">
+<p:sld xmlns:a="http://schemas.openxmlformats.org/drawingml/2006/main" xmlns:r="http://schemas.openxmlformats.org/officeDocument/2006/relationships" xmlns:p="http://schemas.openxmlformats.org/presentationml/2006/main">
   <p:cSld>
     <p:spTree>
       <p:nvGrpSpPr>
@@ -11642,7 +11842,14 @@
         <p:cNvGrpSpPr/>
         <p:nvPr/>
       </p:nvGrpSpPr>
-      <p:grpSpPr/>
+      <p:grpSpPr>
+        <a:xfrm>
+          <a:off x="0" y="0"/>
+          <a:ext cx="0" cy="0"/>
+          <a:chOff x="0" y="0"/>
+          <a:chExt cx="0" cy="0"/>
+        </a:xfrm>
+      </p:grpSpPr>
       <p:sp>
         <p:nvSpPr>
           <p:cNvPr id="2" name="Rectangle 1"/>
@@ -11684,6 +11891,7 @@
           <a:lstStyle/>
           <a:p>
             <a:pPr algn="ctr"/>
+            <a:endParaRPr/>
           </a:p>
         </p:txBody>
       </p:sp>
@@ -11877,7 +12085,7 @@
 </file>
 
 <file path=ppt/slides/slide32.xml><?xml version="1.0" encoding="utf-8"?>
-<p:sld xmlns:a="http://schemas.openxmlformats.org/drawingml/2006/main" xmlns:p="http://schemas.openxmlformats.org/presentationml/2006/main" xmlns:r="http://schemas.openxmlformats.org/officeDocument/2006/relationships">
+<p:sld xmlns:a="http://schemas.openxmlformats.org/drawingml/2006/main" xmlns:r="http://schemas.openxmlformats.org/officeDocument/2006/relationships" xmlns:p="http://schemas.openxmlformats.org/presentationml/2006/main">
   <p:cSld>
     <p:spTree>
       <p:nvGrpSpPr>
@@ -11885,7 +12093,14 @@
         <p:cNvGrpSpPr/>
         <p:nvPr/>
       </p:nvGrpSpPr>
-      <p:grpSpPr/>
+      <p:grpSpPr>
+        <a:xfrm>
+          <a:off x="0" y="0"/>
+          <a:ext cx="0" cy="0"/>
+          <a:chOff x="0" y="0"/>
+          <a:chExt cx="0" cy="0"/>
+        </a:xfrm>
+      </p:grpSpPr>
       <p:sp>
         <p:nvSpPr>
           <p:cNvPr id="2" name="Rectangle 1"/>
@@ -11927,6 +12142,7 @@
           <a:lstStyle/>
           <a:p>
             <a:pPr algn="ctr"/>
+            <a:endParaRPr/>
           </a:p>
         </p:txBody>
       </p:sp>
@@ -12120,7 +12336,7 @@
 </file>
 
 <file path=ppt/slides/slide33.xml><?xml version="1.0" encoding="utf-8"?>
-<p:sld xmlns:a="http://schemas.openxmlformats.org/drawingml/2006/main" xmlns:p="http://schemas.openxmlformats.org/presentationml/2006/main" xmlns:r="http://schemas.openxmlformats.org/officeDocument/2006/relationships">
+<p:sld xmlns:a="http://schemas.openxmlformats.org/drawingml/2006/main" xmlns:r="http://schemas.openxmlformats.org/officeDocument/2006/relationships" xmlns:p="http://schemas.openxmlformats.org/presentationml/2006/main">
   <p:cSld>
     <p:spTree>
       <p:nvGrpSpPr>
@@ -12128,7 +12344,14 @@
         <p:cNvGrpSpPr/>
         <p:nvPr/>
       </p:nvGrpSpPr>
-      <p:grpSpPr/>
+      <p:grpSpPr>
+        <a:xfrm>
+          <a:off x="0" y="0"/>
+          <a:ext cx="0" cy="0"/>
+          <a:chOff x="0" y="0"/>
+          <a:chExt cx="0" cy="0"/>
+        </a:xfrm>
+      </p:grpSpPr>
       <p:sp>
         <p:nvSpPr>
           <p:cNvPr id="2" name="Rectangle 1"/>
@@ -12170,6 +12393,7 @@
           <a:lstStyle/>
           <a:p>
             <a:pPr algn="ctr"/>
+            <a:endParaRPr/>
           </a:p>
         </p:txBody>
       </p:sp>
@@ -12363,7 +12587,7 @@
 </file>
 
 <file path=ppt/slides/slide34.xml><?xml version="1.0" encoding="utf-8"?>
-<p:sld xmlns:a="http://schemas.openxmlformats.org/drawingml/2006/main" xmlns:p="http://schemas.openxmlformats.org/presentationml/2006/main" xmlns:r="http://schemas.openxmlformats.org/officeDocument/2006/relationships">
+<p:sld xmlns:a="http://schemas.openxmlformats.org/drawingml/2006/main" xmlns:r="http://schemas.openxmlformats.org/officeDocument/2006/relationships" xmlns:p="http://schemas.openxmlformats.org/presentationml/2006/main">
   <p:cSld>
     <p:spTree>
       <p:nvGrpSpPr>
@@ -12371,7 +12595,14 @@
         <p:cNvGrpSpPr/>
         <p:nvPr/>
       </p:nvGrpSpPr>
-      <p:grpSpPr/>
+      <p:grpSpPr>
+        <a:xfrm>
+          <a:off x="0" y="0"/>
+          <a:ext cx="0" cy="0"/>
+          <a:chOff x="0" y="0"/>
+          <a:chExt cx="0" cy="0"/>
+        </a:xfrm>
+      </p:grpSpPr>
       <p:sp>
         <p:nvSpPr>
           <p:cNvPr id="2" name="Rectangle 1"/>
@@ -12413,6 +12644,7 @@
           <a:lstStyle/>
           <a:p>
             <a:pPr algn="ctr"/>
+            <a:endParaRPr/>
           </a:p>
         </p:txBody>
       </p:sp>
@@ -12606,7 +12838,7 @@
 </file>
 
 <file path=ppt/slides/slide35.xml><?xml version="1.0" encoding="utf-8"?>
-<p:sld xmlns:a="http://schemas.openxmlformats.org/drawingml/2006/main" xmlns:p="http://schemas.openxmlformats.org/presentationml/2006/main" xmlns:r="http://schemas.openxmlformats.org/officeDocument/2006/relationships">
+<p:sld xmlns:a="http://schemas.openxmlformats.org/drawingml/2006/main" xmlns:r="http://schemas.openxmlformats.org/officeDocument/2006/relationships" xmlns:p="http://schemas.openxmlformats.org/presentationml/2006/main">
   <p:cSld>
     <p:spTree>
       <p:nvGrpSpPr>
@@ -12614,7 +12846,14 @@
         <p:cNvGrpSpPr/>
         <p:nvPr/>
       </p:nvGrpSpPr>
-      <p:grpSpPr/>
+      <p:grpSpPr>
+        <a:xfrm>
+          <a:off x="0" y="0"/>
+          <a:ext cx="0" cy="0"/>
+          <a:chOff x="0" y="0"/>
+          <a:chExt cx="0" cy="0"/>
+        </a:xfrm>
+      </p:grpSpPr>
       <p:sp>
         <p:nvSpPr>
           <p:cNvPr id="2" name="Rectangle 1"/>
@@ -12656,6 +12895,7 @@
           <a:lstStyle/>
           <a:p>
             <a:pPr algn="ctr"/>
+            <a:endParaRPr/>
           </a:p>
         </p:txBody>
       </p:sp>
@@ -12849,7 +13089,7 @@
 </file>
 
 <file path=ppt/slides/slide36.xml><?xml version="1.0" encoding="utf-8"?>
-<p:sld xmlns:a="http://schemas.openxmlformats.org/drawingml/2006/main" xmlns:p="http://schemas.openxmlformats.org/presentationml/2006/main" xmlns:r="http://schemas.openxmlformats.org/officeDocument/2006/relationships">
+<p:sld xmlns:a="http://schemas.openxmlformats.org/drawingml/2006/main" xmlns:r="http://schemas.openxmlformats.org/officeDocument/2006/relationships" xmlns:p="http://schemas.openxmlformats.org/presentationml/2006/main">
   <p:cSld>
     <p:spTree>
       <p:nvGrpSpPr>
@@ -12857,7 +13097,14 @@
         <p:cNvGrpSpPr/>
         <p:nvPr/>
       </p:nvGrpSpPr>
-      <p:grpSpPr/>
+      <p:grpSpPr>
+        <a:xfrm>
+          <a:off x="0" y="0"/>
+          <a:ext cx="0" cy="0"/>
+          <a:chOff x="0" y="0"/>
+          <a:chExt cx="0" cy="0"/>
+        </a:xfrm>
+      </p:grpSpPr>
       <p:sp>
         <p:nvSpPr>
           <p:cNvPr id="2" name="Rectangle 1"/>
@@ -12899,6 +13146,7 @@
           <a:lstStyle/>
           <a:p>
             <a:pPr algn="ctr"/>
+            <a:endParaRPr/>
           </a:p>
         </p:txBody>
       </p:sp>
@@ -13092,7 +13340,7 @@
 </file>
 
 <file path=ppt/slides/slide37.xml><?xml version="1.0" encoding="utf-8"?>
-<p:sld xmlns:a="http://schemas.openxmlformats.org/drawingml/2006/main" xmlns:p="http://schemas.openxmlformats.org/presentationml/2006/main" xmlns:r="http://schemas.openxmlformats.org/officeDocument/2006/relationships">
+<p:sld xmlns:a="http://schemas.openxmlformats.org/drawingml/2006/main" xmlns:r="http://schemas.openxmlformats.org/officeDocument/2006/relationships" xmlns:p="http://schemas.openxmlformats.org/presentationml/2006/main">
   <p:cSld>
     <p:spTree>
       <p:nvGrpSpPr>
@@ -13100,7 +13348,14 @@
         <p:cNvGrpSpPr/>
         <p:nvPr/>
       </p:nvGrpSpPr>
-      <p:grpSpPr/>
+      <p:grpSpPr>
+        <a:xfrm>
+          <a:off x="0" y="0"/>
+          <a:ext cx="0" cy="0"/>
+          <a:chOff x="0" y="0"/>
+          <a:chExt cx="0" cy="0"/>
+        </a:xfrm>
+      </p:grpSpPr>
       <p:sp>
         <p:nvSpPr>
           <p:cNvPr id="2" name="Rectangle 1"/>
@@ -13142,6 +13397,7 @@
           <a:lstStyle/>
           <a:p>
             <a:pPr algn="ctr"/>
+            <a:endParaRPr/>
           </a:p>
         </p:txBody>
       </p:sp>
@@ -13264,6 +13520,7 @@
           <a:lstStyle/>
           <a:p>
             <a:pPr algn="ctr"/>
+            <a:endParaRPr/>
           </a:p>
         </p:txBody>
       </p:sp>
@@ -13331,7 +13588,7 @@
 </file>
 
 <file path=ppt/slides/slide38.xml><?xml version="1.0" encoding="utf-8"?>
-<p:sld xmlns:a="http://schemas.openxmlformats.org/drawingml/2006/main" xmlns:p="http://schemas.openxmlformats.org/presentationml/2006/main" xmlns:r="http://schemas.openxmlformats.org/officeDocument/2006/relationships">
+<p:sld xmlns:a="http://schemas.openxmlformats.org/drawingml/2006/main" xmlns:r="http://schemas.openxmlformats.org/officeDocument/2006/relationships" xmlns:p="http://schemas.openxmlformats.org/presentationml/2006/main">
   <p:cSld>
     <p:spTree>
       <p:nvGrpSpPr>
@@ -13339,7 +13596,14 @@
         <p:cNvGrpSpPr/>
         <p:nvPr/>
       </p:nvGrpSpPr>
-      <p:grpSpPr/>
+      <p:grpSpPr>
+        <a:xfrm>
+          <a:off x="0" y="0"/>
+          <a:ext cx="0" cy="0"/>
+          <a:chOff x="0" y="0"/>
+          <a:chExt cx="0" cy="0"/>
+        </a:xfrm>
+      </p:grpSpPr>
       <p:sp>
         <p:nvSpPr>
           <p:cNvPr id="2" name="Rectangle 1"/>
@@ -13381,6 +13645,7 @@
           <a:lstStyle/>
           <a:p>
             <a:pPr algn="ctr"/>
+            <a:endParaRPr/>
           </a:p>
         </p:txBody>
       </p:sp>
@@ -13574,7 +13839,7 @@
 </file>
 
 <file path=ppt/slides/slide39.xml><?xml version="1.0" encoding="utf-8"?>
-<p:sld xmlns:a="http://schemas.openxmlformats.org/drawingml/2006/main" xmlns:p="http://schemas.openxmlformats.org/presentationml/2006/main" xmlns:r="http://schemas.openxmlformats.org/officeDocument/2006/relationships">
+<p:sld xmlns:a="http://schemas.openxmlformats.org/drawingml/2006/main" xmlns:r="http://schemas.openxmlformats.org/officeDocument/2006/relationships" xmlns:p="http://schemas.openxmlformats.org/presentationml/2006/main">
   <p:cSld>
     <p:spTree>
       <p:nvGrpSpPr>
@@ -13582,7 +13847,14 @@
         <p:cNvGrpSpPr/>
         <p:nvPr/>
       </p:nvGrpSpPr>
-      <p:grpSpPr/>
+      <p:grpSpPr>
+        <a:xfrm>
+          <a:off x="0" y="0"/>
+          <a:ext cx="0" cy="0"/>
+          <a:chOff x="0" y="0"/>
+          <a:chExt cx="0" cy="0"/>
+        </a:xfrm>
+      </p:grpSpPr>
       <p:sp>
         <p:nvSpPr>
           <p:cNvPr id="2" name="Rectangle 1"/>
@@ -13624,6 +13896,7 @@
           <a:lstStyle/>
           <a:p>
             <a:pPr algn="ctr"/>
+            <a:endParaRPr/>
           </a:p>
         </p:txBody>
       </p:sp>
@@ -13817,7 +14090,7 @@
 </file>
 
 <file path=ppt/slides/slide4.xml><?xml version="1.0" encoding="utf-8"?>
-<p:sld xmlns:a="http://schemas.openxmlformats.org/drawingml/2006/main" xmlns:p="http://schemas.openxmlformats.org/presentationml/2006/main" xmlns:r="http://schemas.openxmlformats.org/officeDocument/2006/relationships">
+<p:sld xmlns:a="http://schemas.openxmlformats.org/drawingml/2006/main" xmlns:r="http://schemas.openxmlformats.org/officeDocument/2006/relationships" xmlns:p="http://schemas.openxmlformats.org/presentationml/2006/main">
   <p:cSld>
     <p:spTree>
       <p:nvGrpSpPr>
@@ -13825,7 +14098,14 @@
         <p:cNvGrpSpPr/>
         <p:nvPr/>
       </p:nvGrpSpPr>
-      <p:grpSpPr/>
+      <p:grpSpPr>
+        <a:xfrm>
+          <a:off x="0" y="0"/>
+          <a:ext cx="0" cy="0"/>
+          <a:chOff x="0" y="0"/>
+          <a:chExt cx="0" cy="0"/>
+        </a:xfrm>
+      </p:grpSpPr>
       <p:sp>
         <p:nvSpPr>
           <p:cNvPr id="2" name="Rectangle 1"/>
@@ -13867,6 +14147,7 @@
           <a:lstStyle/>
           <a:p>
             <a:pPr algn="ctr"/>
+            <a:endParaRPr/>
           </a:p>
         </p:txBody>
       </p:sp>
@@ -14060,7 +14341,7 @@
 </file>
 
 <file path=ppt/slides/slide40.xml><?xml version="1.0" encoding="utf-8"?>
-<p:sld xmlns:a="http://schemas.openxmlformats.org/drawingml/2006/main" xmlns:p="http://schemas.openxmlformats.org/presentationml/2006/main" xmlns:r="http://schemas.openxmlformats.org/officeDocument/2006/relationships">
+<p:sld xmlns:a="http://schemas.openxmlformats.org/drawingml/2006/main" xmlns:r="http://schemas.openxmlformats.org/officeDocument/2006/relationships" xmlns:p="http://schemas.openxmlformats.org/presentationml/2006/main">
   <p:cSld>
     <p:spTree>
       <p:nvGrpSpPr>
@@ -14068,7 +14349,14 @@
         <p:cNvGrpSpPr/>
         <p:nvPr/>
       </p:nvGrpSpPr>
-      <p:grpSpPr/>
+      <p:grpSpPr>
+        <a:xfrm>
+          <a:off x="0" y="0"/>
+          <a:ext cx="0" cy="0"/>
+          <a:chOff x="0" y="0"/>
+          <a:chExt cx="0" cy="0"/>
+        </a:xfrm>
+      </p:grpSpPr>
       <p:sp>
         <p:nvSpPr>
           <p:cNvPr id="2" name="Rectangle 1"/>
@@ -14110,6 +14398,7 @@
           <a:lstStyle/>
           <a:p>
             <a:pPr algn="ctr"/>
+            <a:endParaRPr/>
           </a:p>
         </p:txBody>
       </p:sp>
@@ -14232,6 +14521,7 @@
           <a:lstStyle/>
           <a:p>
             <a:pPr algn="ctr"/>
+            <a:endParaRPr/>
           </a:p>
         </p:txBody>
       </p:sp>
@@ -14256,7 +14546,9 @@
             <a:spAutoFit/>
           </a:bodyPr>
           <a:lstStyle/>
-          <a:p/>
+          <a:p>
+            <a:endParaRPr/>
+          </a:p>
         </p:txBody>
       </p:sp>
     </p:spTree>
@@ -14268,7 +14560,7 @@
 </file>
 
 <file path=ppt/slides/slide41.xml><?xml version="1.0" encoding="utf-8"?>
-<p:sld xmlns:a="http://schemas.openxmlformats.org/drawingml/2006/main" xmlns:p="http://schemas.openxmlformats.org/presentationml/2006/main" xmlns:r="http://schemas.openxmlformats.org/officeDocument/2006/relationships">
+<p:sld xmlns:a="http://schemas.openxmlformats.org/drawingml/2006/main" xmlns:r="http://schemas.openxmlformats.org/officeDocument/2006/relationships" xmlns:p="http://schemas.openxmlformats.org/presentationml/2006/main">
   <p:cSld>
     <p:spTree>
       <p:nvGrpSpPr>
@@ -14276,7 +14568,14 @@
         <p:cNvGrpSpPr/>
         <p:nvPr/>
       </p:nvGrpSpPr>
-      <p:grpSpPr/>
+      <p:grpSpPr>
+        <a:xfrm>
+          <a:off x="0" y="0"/>
+          <a:ext cx="0" cy="0"/>
+          <a:chOff x="0" y="0"/>
+          <a:chExt cx="0" cy="0"/>
+        </a:xfrm>
+      </p:grpSpPr>
       <p:sp>
         <p:nvSpPr>
           <p:cNvPr id="2" name="Rectangle 1"/>
@@ -14318,6 +14617,7 @@
           <a:lstStyle/>
           <a:p>
             <a:pPr algn="ctr"/>
+            <a:endParaRPr/>
           </a:p>
         </p:txBody>
       </p:sp>
@@ -14511,7 +14811,7 @@
 </file>
 
 <file path=ppt/slides/slide42.xml><?xml version="1.0" encoding="utf-8"?>
-<p:sld xmlns:a="http://schemas.openxmlformats.org/drawingml/2006/main" xmlns:p="http://schemas.openxmlformats.org/presentationml/2006/main" xmlns:r="http://schemas.openxmlformats.org/officeDocument/2006/relationships">
+<p:sld xmlns:a="http://schemas.openxmlformats.org/drawingml/2006/main" xmlns:r="http://schemas.openxmlformats.org/officeDocument/2006/relationships" xmlns:p="http://schemas.openxmlformats.org/presentationml/2006/main">
   <p:cSld>
     <p:spTree>
       <p:nvGrpSpPr>
@@ -14519,7 +14819,14 @@
         <p:cNvGrpSpPr/>
         <p:nvPr/>
       </p:nvGrpSpPr>
-      <p:grpSpPr/>
+      <p:grpSpPr>
+        <a:xfrm>
+          <a:off x="0" y="0"/>
+          <a:ext cx="0" cy="0"/>
+          <a:chOff x="0" y="0"/>
+          <a:chExt cx="0" cy="0"/>
+        </a:xfrm>
+      </p:grpSpPr>
       <p:sp>
         <p:nvSpPr>
           <p:cNvPr id="2" name="Rectangle 1"/>
@@ -14561,6 +14868,7 @@
           <a:lstStyle/>
           <a:p>
             <a:pPr algn="ctr"/>
+            <a:endParaRPr/>
           </a:p>
         </p:txBody>
       </p:sp>
@@ -14754,7 +15062,7 @@
 </file>
 
 <file path=ppt/slides/slide43.xml><?xml version="1.0" encoding="utf-8"?>
-<p:sld xmlns:a="http://schemas.openxmlformats.org/drawingml/2006/main" xmlns:p="http://schemas.openxmlformats.org/presentationml/2006/main" xmlns:r="http://schemas.openxmlformats.org/officeDocument/2006/relationships">
+<p:sld xmlns:a="http://schemas.openxmlformats.org/drawingml/2006/main" xmlns:r="http://schemas.openxmlformats.org/officeDocument/2006/relationships" xmlns:p="http://schemas.openxmlformats.org/presentationml/2006/main">
   <p:cSld>
     <p:spTree>
       <p:nvGrpSpPr>
@@ -14762,7 +15070,14 @@
         <p:cNvGrpSpPr/>
         <p:nvPr/>
       </p:nvGrpSpPr>
-      <p:grpSpPr/>
+      <p:grpSpPr>
+        <a:xfrm>
+          <a:off x="0" y="0"/>
+          <a:ext cx="0" cy="0"/>
+          <a:chOff x="0" y="0"/>
+          <a:chExt cx="0" cy="0"/>
+        </a:xfrm>
+      </p:grpSpPr>
       <p:sp>
         <p:nvSpPr>
           <p:cNvPr id="2" name="Rectangle 1"/>
@@ -14804,6 +15119,7 @@
           <a:lstStyle/>
           <a:p>
             <a:pPr algn="ctr"/>
+            <a:endParaRPr/>
           </a:p>
         </p:txBody>
       </p:sp>
@@ -14997,7 +15313,7 @@
 </file>
 
 <file path=ppt/slides/slide5.xml><?xml version="1.0" encoding="utf-8"?>
-<p:sld xmlns:a="http://schemas.openxmlformats.org/drawingml/2006/main" xmlns:p="http://schemas.openxmlformats.org/presentationml/2006/main" xmlns:r="http://schemas.openxmlformats.org/officeDocument/2006/relationships">
+<p:sld xmlns:a="http://schemas.openxmlformats.org/drawingml/2006/main" xmlns:r="http://schemas.openxmlformats.org/officeDocument/2006/relationships" xmlns:p="http://schemas.openxmlformats.org/presentationml/2006/main">
   <p:cSld>
     <p:spTree>
       <p:nvGrpSpPr>
@@ -15005,7 +15321,14 @@
         <p:cNvGrpSpPr/>
         <p:nvPr/>
       </p:nvGrpSpPr>
-      <p:grpSpPr/>
+      <p:grpSpPr>
+        <a:xfrm>
+          <a:off x="0" y="0"/>
+          <a:ext cx="0" cy="0"/>
+          <a:chOff x="0" y="0"/>
+          <a:chExt cx="0" cy="0"/>
+        </a:xfrm>
+      </p:grpSpPr>
       <p:sp>
         <p:nvSpPr>
           <p:cNvPr id="2" name="Rectangle 1"/>
@@ -15047,6 +15370,7 @@
           <a:lstStyle/>
           <a:p>
             <a:pPr algn="ctr"/>
+            <a:endParaRPr/>
           </a:p>
         </p:txBody>
       </p:sp>
@@ -15169,6 +15493,7 @@
           <a:lstStyle/>
           <a:p>
             <a:pPr algn="ctr"/>
+            <a:endParaRPr/>
           </a:p>
         </p:txBody>
       </p:sp>
@@ -15236,7 +15561,7 @@
 </file>
 
 <file path=ppt/slides/slide6.xml><?xml version="1.0" encoding="utf-8"?>
-<p:sld xmlns:a="http://schemas.openxmlformats.org/drawingml/2006/main" xmlns:p="http://schemas.openxmlformats.org/presentationml/2006/main" xmlns:r="http://schemas.openxmlformats.org/officeDocument/2006/relationships">
+<p:sld xmlns:a="http://schemas.openxmlformats.org/drawingml/2006/main" xmlns:r="http://schemas.openxmlformats.org/officeDocument/2006/relationships" xmlns:p="http://schemas.openxmlformats.org/presentationml/2006/main">
   <p:cSld>
     <p:spTree>
       <p:nvGrpSpPr>
@@ -15244,7 +15569,14 @@
         <p:cNvGrpSpPr/>
         <p:nvPr/>
       </p:nvGrpSpPr>
-      <p:grpSpPr/>
+      <p:grpSpPr>
+        <a:xfrm>
+          <a:off x="0" y="0"/>
+          <a:ext cx="0" cy="0"/>
+          <a:chOff x="0" y="0"/>
+          <a:chExt cx="0" cy="0"/>
+        </a:xfrm>
+      </p:grpSpPr>
       <p:sp>
         <p:nvSpPr>
           <p:cNvPr id="2" name="Rectangle 1"/>
@@ -15286,6 +15618,7 @@
           <a:lstStyle/>
           <a:p>
             <a:pPr algn="ctr"/>
+            <a:endParaRPr/>
           </a:p>
         </p:txBody>
       </p:sp>
@@ -15479,7 +15812,7 @@
 </file>
 
 <file path=ppt/slides/slide7.xml><?xml version="1.0" encoding="utf-8"?>
-<p:sld xmlns:a="http://schemas.openxmlformats.org/drawingml/2006/main" xmlns:p="http://schemas.openxmlformats.org/presentationml/2006/main" xmlns:r="http://schemas.openxmlformats.org/officeDocument/2006/relationships">
+<p:sld xmlns:a="http://schemas.openxmlformats.org/drawingml/2006/main" xmlns:r="http://schemas.openxmlformats.org/officeDocument/2006/relationships" xmlns:p="http://schemas.openxmlformats.org/presentationml/2006/main">
   <p:cSld>
     <p:spTree>
       <p:nvGrpSpPr>
@@ -15487,7 +15820,14 @@
         <p:cNvGrpSpPr/>
         <p:nvPr/>
       </p:nvGrpSpPr>
-      <p:grpSpPr/>
+      <p:grpSpPr>
+        <a:xfrm>
+          <a:off x="0" y="0"/>
+          <a:ext cx="0" cy="0"/>
+          <a:chOff x="0" y="0"/>
+          <a:chExt cx="0" cy="0"/>
+        </a:xfrm>
+      </p:grpSpPr>
       <p:sp>
         <p:nvSpPr>
           <p:cNvPr id="2" name="Rectangle 1"/>
@@ -15529,6 +15869,7 @@
           <a:lstStyle/>
           <a:p>
             <a:pPr algn="ctr"/>
+            <a:endParaRPr/>
           </a:p>
         </p:txBody>
       </p:sp>
@@ -15722,7 +16063,7 @@
 </file>
 
 <file path=ppt/slides/slide8.xml><?xml version="1.0" encoding="utf-8"?>
-<p:sld xmlns:a="http://schemas.openxmlformats.org/drawingml/2006/main" xmlns:p="http://schemas.openxmlformats.org/presentationml/2006/main" xmlns:r="http://schemas.openxmlformats.org/officeDocument/2006/relationships">
+<p:sld xmlns:a="http://schemas.openxmlformats.org/drawingml/2006/main" xmlns:r="http://schemas.openxmlformats.org/officeDocument/2006/relationships" xmlns:p="http://schemas.openxmlformats.org/presentationml/2006/main">
   <p:cSld>
     <p:spTree>
       <p:nvGrpSpPr>
@@ -15730,7 +16071,14 @@
         <p:cNvGrpSpPr/>
         <p:nvPr/>
       </p:nvGrpSpPr>
-      <p:grpSpPr/>
+      <p:grpSpPr>
+        <a:xfrm>
+          <a:off x="0" y="0"/>
+          <a:ext cx="0" cy="0"/>
+          <a:chOff x="0" y="0"/>
+          <a:chExt cx="0" cy="0"/>
+        </a:xfrm>
+      </p:grpSpPr>
       <p:sp>
         <p:nvSpPr>
           <p:cNvPr id="2" name="Rectangle 1"/>
@@ -15772,6 +16120,7 @@
           <a:lstStyle/>
           <a:p>
             <a:pPr algn="ctr"/>
+            <a:endParaRPr/>
           </a:p>
         </p:txBody>
       </p:sp>
@@ -15965,7 +16314,7 @@
 </file>
 
 <file path=ppt/slides/slide9.xml><?xml version="1.0" encoding="utf-8"?>
-<p:sld xmlns:a="http://schemas.openxmlformats.org/drawingml/2006/main" xmlns:p="http://schemas.openxmlformats.org/presentationml/2006/main" xmlns:r="http://schemas.openxmlformats.org/officeDocument/2006/relationships">
+<p:sld xmlns:a="http://schemas.openxmlformats.org/drawingml/2006/main" xmlns:r="http://schemas.openxmlformats.org/officeDocument/2006/relationships" xmlns:p="http://schemas.openxmlformats.org/presentationml/2006/main">
   <p:cSld>
     <p:spTree>
       <p:nvGrpSpPr>
@@ -15973,7 +16322,14 @@
         <p:cNvGrpSpPr/>
         <p:nvPr/>
       </p:nvGrpSpPr>
-      <p:grpSpPr/>
+      <p:grpSpPr>
+        <a:xfrm>
+          <a:off x="0" y="0"/>
+          <a:ext cx="0" cy="0"/>
+          <a:chOff x="0" y="0"/>
+          <a:chExt cx="0" cy="0"/>
+        </a:xfrm>
+      </p:grpSpPr>
       <p:sp>
         <p:nvSpPr>
           <p:cNvPr id="2" name="Rectangle 1"/>
@@ -16015,6 +16371,7 @@
           <a:lstStyle/>
           <a:p>
             <a:pPr algn="ctr"/>
+            <a:endParaRPr/>
           </a:p>
         </p:txBody>
       </p:sp>
@@ -16137,6 +16494,7 @@
           <a:lstStyle/>
           <a:p>
             <a:pPr algn="ctr"/>
+            <a:endParaRPr/>
           </a:p>
         </p:txBody>
       </p:sp>
@@ -16524,7 +16882,7 @@
 </file>
 
 <file path=ppt/theme/theme2.xml><?xml version="1.0" encoding="utf-8"?>
-<a:theme xmlns:a="http://schemas.openxmlformats.org/drawingml/2006/main" name="Office Theme">
+<a:theme xmlns:a="http://schemas.openxmlformats.org/drawingml/2006/main" name="Office 테마">
   <a:themeElements>
     <a:clrScheme name="Office">
       <a:dk1>
@@ -16534,44 +16892,44 @@
         <a:sysClr val="window" lastClr="FFFFFF"/>
       </a:lt1>
       <a:dk2>
-        <a:srgbClr val="1F497D"/>
+        <a:srgbClr val="0E2841"/>
       </a:dk2>
       <a:lt2>
-        <a:srgbClr val="EEECE1"/>
+        <a:srgbClr val="E8E8E8"/>
       </a:lt2>
       <a:accent1>
-        <a:srgbClr val="4F81BD"/>
+        <a:srgbClr val="156082"/>
       </a:accent1>
       <a:accent2>
-        <a:srgbClr val="C0504D"/>
+        <a:srgbClr val="E97132"/>
       </a:accent2>
       <a:accent3>
-        <a:srgbClr val="9BBB59"/>
+        <a:srgbClr val="196B24"/>
       </a:accent3>
       <a:accent4>
-        <a:srgbClr val="8064A2"/>
+        <a:srgbClr val="0F9ED5"/>
       </a:accent4>
       <a:accent5>
-        <a:srgbClr val="4BACC6"/>
+        <a:srgbClr val="A02B93"/>
       </a:accent5>
       <a:accent6>
-        <a:srgbClr val="F79646"/>
+        <a:srgbClr val="4EA72E"/>
       </a:accent6>
       <a:hlink>
-        <a:srgbClr val="0000FF"/>
+        <a:srgbClr val="467886"/>
       </a:hlink>
       <a:folHlink>
-        <a:srgbClr val="800080"/>
+        <a:srgbClr val="96607D"/>
       </a:folHlink>
     </a:clrScheme>
     <a:fontScheme name="Office">
       <a:majorFont>
-        <a:latin typeface="Calibri"/>
+        <a:latin typeface="맑은 고딕" panose="02110004020202020204"/>
         <a:ea typeface=""/>
         <a:cs typeface=""/>
-        <a:font script="Jpan" typeface="ＭＳ Ｐゴシック"/>
+        <a:font script="Jpan" typeface="游ゴシック Light"/>
         <a:font script="Hang" typeface="맑은 고딕"/>
-        <a:font script="Hans" typeface="宋体"/>
+        <a:font script="Hans" typeface="等线 Light"/>
         <a:font script="Hant" typeface="新細明體"/>
         <a:font script="Arab" typeface="Times New Roman"/>
         <a:font script="Hebr" typeface="Times New Roman"/>
@@ -16599,14 +16957,31 @@
         <a:font script="Viet" typeface="Times New Roman"/>
         <a:font script="Uigh" typeface="Microsoft Uighur"/>
         <a:font script="Geor" typeface="Sylfaen"/>
+        <a:font script="Armn" typeface="Arial"/>
+        <a:font script="Bugi" typeface="Leelawadee UI"/>
+        <a:font script="Bopo" typeface="Microsoft JhengHei"/>
+        <a:font script="Java" typeface="Javanese Text"/>
+        <a:font script="Lisu" typeface="Segoe UI"/>
+        <a:font script="Mymr" typeface="Myanmar Text"/>
+        <a:font script="Nkoo" typeface="Ebrima"/>
+        <a:font script="Olck" typeface="Nirmala UI"/>
+        <a:font script="Osma" typeface="Ebrima"/>
+        <a:font script="Phag" typeface="Phagspa"/>
+        <a:font script="Syrn" typeface="Estrangelo Edessa"/>
+        <a:font script="Syrj" typeface="Estrangelo Edessa"/>
+        <a:font script="Syre" typeface="Estrangelo Edessa"/>
+        <a:font script="Sora" typeface="Nirmala UI"/>
+        <a:font script="Tale" typeface="Microsoft Tai Le"/>
+        <a:font script="Talu" typeface="Microsoft New Tai Lue"/>
+        <a:font script="Tfng" typeface="Ebrima"/>
       </a:majorFont>
       <a:minorFont>
-        <a:latin typeface="Calibri"/>
+        <a:latin typeface="맑은 고딕" panose="02110004020202020204"/>
         <a:ea typeface=""/>
         <a:cs typeface=""/>
-        <a:font script="Jpan" typeface="ＭＳ Ｐゴシック"/>
+        <a:font script="Jpan" typeface="游ゴシック"/>
         <a:font script="Hang" typeface="맑은 고딕"/>
-        <a:font script="Hans" typeface="宋体"/>
+        <a:font script="Hans" typeface="等线"/>
         <a:font script="Hant" typeface="新細明體"/>
         <a:font script="Arab" typeface="Arial"/>
         <a:font script="Hebr" typeface="Arial"/>
@@ -16634,6 +17009,23 @@
         <a:font script="Viet" typeface="Arial"/>
         <a:font script="Uigh" typeface="Microsoft Uighur"/>
         <a:font script="Geor" typeface="Sylfaen"/>
+        <a:font script="Armn" typeface="Arial"/>
+        <a:font script="Bugi" typeface="Leelawadee UI"/>
+        <a:font script="Bopo" typeface="Microsoft JhengHei"/>
+        <a:font script="Java" typeface="Javanese Text"/>
+        <a:font script="Lisu" typeface="Segoe UI"/>
+        <a:font script="Mymr" typeface="Myanmar Text"/>
+        <a:font script="Nkoo" typeface="Ebrima"/>
+        <a:font script="Olck" typeface="Nirmala UI"/>
+        <a:font script="Osma" typeface="Ebrima"/>
+        <a:font script="Phag" typeface="Phagspa"/>
+        <a:font script="Syrn" typeface="Estrangelo Edessa"/>
+        <a:font script="Syrj" typeface="Estrangelo Edessa"/>
+        <a:font script="Syre" typeface="Estrangelo Edessa"/>
+        <a:font script="Sora" typeface="Nirmala UI"/>
+        <a:font script="Tale" typeface="Microsoft Tai Le"/>
+        <a:font script="Talu" typeface="Microsoft New Tai Lue"/>
+        <a:font script="Tfng" typeface="Ebrima"/>
       </a:minorFont>
     </a:fontScheme>
     <a:fmtScheme name="Office">
@@ -16645,180 +17037,136 @@
           <a:gsLst>
             <a:gs pos="0">
               <a:schemeClr val="phClr">
-                <a:tint val="50000"/>
-                <a:satMod val="300000"/>
+                <a:lumMod val="110000"/>
+                <a:satMod val="105000"/>
+                <a:tint val="67000"/>
               </a:schemeClr>
             </a:gs>
-            <a:gs pos="35000">
+            <a:gs pos="50000">
               <a:schemeClr val="phClr">
-                <a:tint val="37000"/>
-                <a:satMod val="300000"/>
+                <a:lumMod val="105000"/>
+                <a:satMod val="103000"/>
+                <a:tint val="73000"/>
               </a:schemeClr>
             </a:gs>
             <a:gs pos="100000">
               <a:schemeClr val="phClr">
-                <a:tint val="15000"/>
-                <a:satMod val="350000"/>
+                <a:lumMod val="105000"/>
+                <a:satMod val="109000"/>
+                <a:tint val="81000"/>
               </a:schemeClr>
             </a:gs>
           </a:gsLst>
-          <a:lin ang="16200000" scaled="1"/>
+          <a:lin ang="5400000" scaled="0"/>
         </a:gradFill>
         <a:gradFill rotWithShape="1">
           <a:gsLst>
             <a:gs pos="0">
               <a:schemeClr val="phClr">
-                <a:tint val="100000"/>
+                <a:satMod val="103000"/>
+                <a:lumMod val="102000"/>
+                <a:tint val="94000"/>
+              </a:schemeClr>
+            </a:gs>
+            <a:gs pos="50000">
+              <a:schemeClr val="phClr">
+                <a:satMod val="110000"/>
+                <a:lumMod val="100000"/>
                 <a:shade val="100000"/>
-                <a:satMod val="130000"/>
               </a:schemeClr>
             </a:gs>
             <a:gs pos="100000">
               <a:schemeClr val="phClr">
-                <a:tint val="50000"/>
-                <a:shade val="100000"/>
-                <a:satMod val="350000"/>
+                <a:lumMod val="99000"/>
+                <a:satMod val="120000"/>
+                <a:shade val="78000"/>
               </a:schemeClr>
             </a:gs>
           </a:gsLst>
-          <a:lin ang="16200000" scaled="0"/>
+          <a:lin ang="5400000" scaled="0"/>
         </a:gradFill>
       </a:fillStyleLst>
       <a:lnStyleLst>
-        <a:ln w="9525" cap="flat" cmpd="sng" algn="ctr">
+        <a:ln w="12700" cap="flat" cmpd="sng" algn="ctr">
           <a:solidFill>
-            <a:schemeClr val="phClr">
-              <a:shade val="95000"/>
-              <a:satMod val="105000"/>
-            </a:schemeClr>
+            <a:schemeClr val="phClr"/>
           </a:solidFill>
           <a:prstDash val="solid"/>
+          <a:miter lim="800000"/>
+        </a:ln>
+        <a:ln w="19050" cap="flat" cmpd="sng" algn="ctr">
+          <a:solidFill>
+            <a:schemeClr val="phClr"/>
+          </a:solidFill>
+          <a:prstDash val="solid"/>
+          <a:miter lim="800000"/>
         </a:ln>
         <a:ln w="25400" cap="flat" cmpd="sng" algn="ctr">
           <a:solidFill>
             <a:schemeClr val="phClr"/>
           </a:solidFill>
           <a:prstDash val="solid"/>
-        </a:ln>
-        <a:ln w="38100" cap="flat" cmpd="sng" algn="ctr">
-          <a:solidFill>
-            <a:schemeClr val="phClr"/>
-          </a:solidFill>
-          <a:prstDash val="solid"/>
+          <a:miter lim="800000"/>
         </a:ln>
       </a:lnStyleLst>
       <a:effectStyleLst>
         <a:effectStyle>
+          <a:effectLst/>
+        </a:effectStyle>
+        <a:effectStyle>
+          <a:effectLst/>
+        </a:effectStyle>
+        <a:effectStyle>
           <a:effectLst>
-            <a:outerShdw blurRad="40000" dist="20000" dir="5400000" rotWithShape="0">
+            <a:outerShdw blurRad="57150" dist="19050" dir="5400000" algn="ctr" rotWithShape="0">
               <a:srgbClr val="000000">
-                <a:alpha val="38000"/>
+                <a:alpha val="63000"/>
               </a:srgbClr>
             </a:outerShdw>
           </a:effectLst>
-        </a:effectStyle>
-        <a:effectStyle>
-          <a:effectLst>
-            <a:outerShdw blurRad="40000" dist="23000" dir="5400000" rotWithShape="0">
-              <a:srgbClr val="000000">
-                <a:alpha val="35000"/>
-              </a:srgbClr>
-            </a:outerShdw>
-          </a:effectLst>
-        </a:effectStyle>
-        <a:effectStyle>
-          <a:effectLst>
-            <a:outerShdw blurRad="40000" dist="23000" dir="5400000" rotWithShape="0">
-              <a:srgbClr val="000000">
-                <a:alpha val="35000"/>
-              </a:srgbClr>
-            </a:outerShdw>
-          </a:effectLst>
-          <a:scene3d>
-            <a:camera prst="orthographicFront">
-              <a:rot lat="0" lon="0" rev="0"/>
-            </a:camera>
-            <a:lightRig rig="threePt" dir="t">
-              <a:rot lat="0" lon="0" rev="1200000"/>
-            </a:lightRig>
-          </a:scene3d>
-          <a:sp3d>
-            <a:bevelT w="63500" h="25400"/>
-          </a:sp3d>
         </a:effectStyle>
       </a:effectStyleLst>
       <a:bgFillStyleLst>
         <a:solidFill>
           <a:schemeClr val="phClr"/>
         </a:solidFill>
+        <a:solidFill>
+          <a:schemeClr val="phClr">
+            <a:tint val="95000"/>
+            <a:satMod val="170000"/>
+          </a:schemeClr>
+        </a:solidFill>
         <a:gradFill rotWithShape="1">
           <a:gsLst>
             <a:gs pos="0">
               <a:schemeClr val="phClr">
-                <a:tint val="40000"/>
-                <a:satMod val="350000"/>
+                <a:tint val="93000"/>
+                <a:satMod val="150000"/>
+                <a:shade val="98000"/>
+                <a:lumMod val="102000"/>
               </a:schemeClr>
             </a:gs>
-            <a:gs pos="40000">
+            <a:gs pos="50000">
               <a:schemeClr val="phClr">
-                <a:tint val="45000"/>
-                <a:shade val="99000"/>
-                <a:satMod val="350000"/>
+                <a:tint val="98000"/>
+                <a:satMod val="130000"/>
+                <a:shade val="90000"/>
+                <a:lumMod val="103000"/>
               </a:schemeClr>
             </a:gs>
             <a:gs pos="100000">
               <a:schemeClr val="phClr">
-                <a:shade val="20000"/>
-                <a:satMod val="255000"/>
+                <a:shade val="63000"/>
+                <a:satMod val="120000"/>
               </a:schemeClr>
             </a:gs>
           </a:gsLst>
-          <a:path path="circle">
-            <a:fillToRect l="50000" t="-80000" r="50000" b="180000"/>
-          </a:path>
-        </a:gradFill>
-        <a:gradFill rotWithShape="1">
-          <a:gsLst>
-            <a:gs pos="0">
-              <a:schemeClr val="phClr">
-                <a:tint val="80000"/>
-                <a:satMod val="300000"/>
-              </a:schemeClr>
-            </a:gs>
-            <a:gs pos="100000">
-              <a:schemeClr val="phClr">
-                <a:shade val="30000"/>
-                <a:satMod val="200000"/>
-              </a:schemeClr>
-            </a:gs>
-          </a:gsLst>
-          <a:path path="circle">
-            <a:fillToRect l="50000" t="50000" r="50000" b="50000"/>
-          </a:path>
+          <a:lin ang="5400000" scaled="0"/>
         </a:gradFill>
       </a:bgFillStyleLst>
     </a:fmtScheme>
   </a:themeElements>
   <a:objectDefaults>
-    <a:spDef>
-      <a:spPr/>
-      <a:bodyPr/>
-      <a:lstStyle/>
-      <a:style>
-        <a:lnRef idx="1">
-          <a:schemeClr val="accent1"/>
-        </a:lnRef>
-        <a:fillRef idx="3">
-          <a:schemeClr val="accent1"/>
-        </a:fillRef>
-        <a:effectRef idx="2">
-          <a:schemeClr val="accent1"/>
-        </a:effectRef>
-        <a:fontRef idx="minor">
-          <a:schemeClr val="lt1"/>
-        </a:fontRef>
-      </a:style>
-    </a:spDef>
     <a:lnDef>
       <a:spPr/>
       <a:bodyPr/>
@@ -16840,5 +17188,10 @@
     </a:lnDef>
   </a:objectDefaults>
   <a:extraClrSchemeLst/>
+  <a:extLst>
+    <a:ext uri="{05A4C25C-085E-4340-85A3-A5531E510DB2}">
+      <thm15:themeFamily xmlns:thm15="http://schemas.microsoft.com/office/thememl/2012/main" name="Office Theme" id="{2E142A2C-CD16-42D6-873A-C26D2A0506FA}" vid="{1BDDFF52-6CD6-40A5-AB3C-68EB2F1E4D0A}"/>
+    </a:ext>
+  </a:extLst>
 </a:theme>
 </file>